--- a/GIT Workshop.pptx
+++ b/GIT Workshop.pptx
@@ -5,52 +5,53 @@
     <p:sldMasterId id="2147483648" r:id="rId1"/>
   </p:sldMasterIdLst>
   <p:notesMasterIdLst>
-    <p:notesMasterId r:id="rId45"/>
+    <p:notesMasterId r:id="rId46"/>
   </p:notesMasterIdLst>
   <p:sldIdLst>
     <p:sldId id="256" r:id="rId2"/>
     <p:sldId id="258" r:id="rId3"/>
     <p:sldId id="261" r:id="rId4"/>
     <p:sldId id="311" r:id="rId5"/>
-    <p:sldId id="269" r:id="rId6"/>
-    <p:sldId id="312" r:id="rId7"/>
-    <p:sldId id="270" r:id="rId8"/>
-    <p:sldId id="272" r:id="rId9"/>
-    <p:sldId id="273" r:id="rId10"/>
-    <p:sldId id="274" r:id="rId11"/>
-    <p:sldId id="275" r:id="rId12"/>
-    <p:sldId id="276" r:id="rId13"/>
-    <p:sldId id="280" r:id="rId14"/>
-    <p:sldId id="277" r:id="rId15"/>
-    <p:sldId id="278" r:id="rId16"/>
-    <p:sldId id="279" r:id="rId17"/>
-    <p:sldId id="286" r:id="rId18"/>
-    <p:sldId id="281" r:id="rId19"/>
-    <p:sldId id="282" r:id="rId20"/>
-    <p:sldId id="283" r:id="rId21"/>
-    <p:sldId id="284" r:id="rId22"/>
-    <p:sldId id="285" r:id="rId23"/>
-    <p:sldId id="292" r:id="rId24"/>
-    <p:sldId id="287" r:id="rId25"/>
-    <p:sldId id="290" r:id="rId26"/>
-    <p:sldId id="289" r:id="rId27"/>
-    <p:sldId id="291" r:id="rId28"/>
-    <p:sldId id="293" r:id="rId29"/>
-    <p:sldId id="295" r:id="rId30"/>
-    <p:sldId id="296" r:id="rId31"/>
-    <p:sldId id="297" r:id="rId32"/>
-    <p:sldId id="298" r:id="rId33"/>
-    <p:sldId id="299" r:id="rId34"/>
-    <p:sldId id="303" r:id="rId35"/>
-    <p:sldId id="309" r:id="rId36"/>
-    <p:sldId id="310" r:id="rId37"/>
-    <p:sldId id="301" r:id="rId38"/>
-    <p:sldId id="302" r:id="rId39"/>
-    <p:sldId id="304" r:id="rId40"/>
-    <p:sldId id="305" r:id="rId41"/>
-    <p:sldId id="306" r:id="rId42"/>
-    <p:sldId id="308" r:id="rId43"/>
-    <p:sldId id="300" r:id="rId44"/>
+    <p:sldId id="313" r:id="rId6"/>
+    <p:sldId id="269" r:id="rId7"/>
+    <p:sldId id="312" r:id="rId8"/>
+    <p:sldId id="270" r:id="rId9"/>
+    <p:sldId id="272" r:id="rId10"/>
+    <p:sldId id="273" r:id="rId11"/>
+    <p:sldId id="274" r:id="rId12"/>
+    <p:sldId id="275" r:id="rId13"/>
+    <p:sldId id="276" r:id="rId14"/>
+    <p:sldId id="280" r:id="rId15"/>
+    <p:sldId id="277" r:id="rId16"/>
+    <p:sldId id="278" r:id="rId17"/>
+    <p:sldId id="279" r:id="rId18"/>
+    <p:sldId id="286" r:id="rId19"/>
+    <p:sldId id="281" r:id="rId20"/>
+    <p:sldId id="282" r:id="rId21"/>
+    <p:sldId id="283" r:id="rId22"/>
+    <p:sldId id="284" r:id="rId23"/>
+    <p:sldId id="285" r:id="rId24"/>
+    <p:sldId id="292" r:id="rId25"/>
+    <p:sldId id="287" r:id="rId26"/>
+    <p:sldId id="290" r:id="rId27"/>
+    <p:sldId id="289" r:id="rId28"/>
+    <p:sldId id="291" r:id="rId29"/>
+    <p:sldId id="293" r:id="rId30"/>
+    <p:sldId id="295" r:id="rId31"/>
+    <p:sldId id="296" r:id="rId32"/>
+    <p:sldId id="297" r:id="rId33"/>
+    <p:sldId id="298" r:id="rId34"/>
+    <p:sldId id="299" r:id="rId35"/>
+    <p:sldId id="303" r:id="rId36"/>
+    <p:sldId id="309" r:id="rId37"/>
+    <p:sldId id="310" r:id="rId38"/>
+    <p:sldId id="301" r:id="rId39"/>
+    <p:sldId id="302" r:id="rId40"/>
+    <p:sldId id="304" r:id="rId41"/>
+    <p:sldId id="305" r:id="rId42"/>
+    <p:sldId id="306" r:id="rId43"/>
+    <p:sldId id="308" r:id="rId44"/>
+    <p:sldId id="300" r:id="rId45"/>
   </p:sldIdLst>
   <p:sldSz cx="12192000" cy="6858000"/>
   <p:notesSz cx="6858000" cy="9144000"/>
@@ -151,7 +152,7 @@
   </p:defaultTextStyle>
   <p:extLst>
     <p:ext uri="{EFAFB233-063F-42B5-8137-9DF3F51BA10A}">
-      <p15:sldGuideLst xmlns="" xmlns:p15="http://schemas.microsoft.com/office/powerpoint/2012/main"/>
+      <p15:sldGuideLst xmlns:p15="http://schemas.microsoft.com/office/powerpoint/2012/main" xmlns=""/>
     </p:ext>
   </p:extLst>
 </p:presentation>
@@ -10074,29 +10075,29 @@
     </dgm:pt>
   </dgm:ptLst>
   <dgm:cxnLst>
-    <dgm:cxn modelId="{E6C1B57D-17EB-4747-B8BB-414271199764}" type="presOf" srcId="{F41C99E5-1E78-49F1-99AD-9DEF5CDD3CB2}" destId="{C22FEDB9-95ED-45E5-987A-918B5EACA92D}" srcOrd="0" destOrd="0" presId="urn:microsoft.com/office/officeart/2005/8/layout/hList1"/>
+    <dgm:cxn modelId="{EB2F2BE6-1C33-433D-AC03-0B9B8AF10452}" srcId="{239C9AEE-C2E9-4EB4-BC27-E84F9208AFAE}" destId="{26D0A223-316C-4307-9A6D-53698C146143}" srcOrd="1" destOrd="0" parTransId="{BE3F9E48-68B9-4D8D-A45F-058CE3216E13}" sibTransId="{BCCBAB60-4E9A-4745-BB24-0468C495AC63}"/>
+    <dgm:cxn modelId="{F5D58AE2-5C24-4785-9C54-0797F0C4B170}" type="presOf" srcId="{60B28F44-6288-4FC8-92F2-4295EE218636}" destId="{972278DA-F6F2-45B6-B095-16915583DEF6}" srcOrd="0" destOrd="0" presId="urn:microsoft.com/office/officeart/2005/8/layout/hList1"/>
+    <dgm:cxn modelId="{C264A46B-1A28-4B46-BDDD-F34A48040F88}" type="presOf" srcId="{711CFEDA-D059-4229-9CC6-056C16570713}" destId="{3E9E07FA-685D-44C5-A093-D959270CDDDD}" srcOrd="0" destOrd="0" presId="urn:microsoft.com/office/officeart/2005/8/layout/hList1"/>
+    <dgm:cxn modelId="{1121BBA8-908A-46B4-B805-516700E51EBC}" srcId="{F41C99E5-1E78-49F1-99AD-9DEF5CDD3CB2}" destId="{DF5C9C72-8944-456A-BAC3-EEF8ED867729}" srcOrd="0" destOrd="0" parTransId="{C2635804-4A93-4702-AE9C-42AEE596C712}" sibTransId="{E37D0F42-C6B2-4033-B5FF-106DCA0AF609}"/>
     <dgm:cxn modelId="{4CCB940D-29F1-4815-AE7E-5D3A65B1D4A1}" type="presOf" srcId="{239C9AEE-C2E9-4EB4-BC27-E84F9208AFAE}" destId="{EDA5A033-B7BA-428F-ABC3-01BCAA43165C}" srcOrd="0" destOrd="0" presId="urn:microsoft.com/office/officeart/2005/8/layout/hList1"/>
-    <dgm:cxn modelId="{1121BBA8-908A-46B4-B805-516700E51EBC}" srcId="{F41C99E5-1E78-49F1-99AD-9DEF5CDD3CB2}" destId="{DF5C9C72-8944-456A-BAC3-EEF8ED867729}" srcOrd="0" destOrd="0" parTransId="{C2635804-4A93-4702-AE9C-42AEE596C712}" sibTransId="{E37D0F42-C6B2-4033-B5FF-106DCA0AF609}"/>
-    <dgm:cxn modelId="{45376048-EDAF-47C6-8C6F-35845416CE06}" type="presOf" srcId="{26D0A223-316C-4307-9A6D-53698C146143}" destId="{972278DA-F6F2-45B6-B095-16915583DEF6}" srcOrd="0" destOrd="1" presId="urn:microsoft.com/office/officeart/2005/8/layout/hList1"/>
-    <dgm:cxn modelId="{E00BAECB-881C-466B-A460-C60B35C27924}" srcId="{CCB94CE9-036C-4344-8F72-DC49A6C92A75}" destId="{7B5602D3-4FCA-4374-8A46-5584177DD9BE}" srcOrd="1" destOrd="0" parTransId="{29F65A0B-5E9F-448A-9348-501E198E9674}" sibTransId="{7AF73E08-2904-4A17-A8B8-9F02C713DC04}"/>
-    <dgm:cxn modelId="{B635D26E-8E35-44BE-9117-2803715B2102}" srcId="{CCB94CE9-036C-4344-8F72-DC49A6C92A75}" destId="{D554AED9-94E6-4CA5-8AE8-D2B9DDE89938}" srcOrd="2" destOrd="0" parTransId="{29E7511E-BCB4-4DEF-956C-F5C068A4516A}" sibTransId="{7AB50E93-C454-48A4-A3DE-289775872F74}"/>
-    <dgm:cxn modelId="{B36BEFE1-EB5A-426C-BC4C-24539E9E4E45}" srcId="{239C9AEE-C2E9-4EB4-BC27-E84F9208AFAE}" destId="{60B28F44-6288-4FC8-92F2-4295EE218636}" srcOrd="0" destOrd="0" parTransId="{116E80BD-FC97-4C0C-BA64-581F0E4C23B4}" sibTransId="{6225A663-0CCC-4D6E-B7C3-8693CECBB933}"/>
     <dgm:cxn modelId="{88464028-19A5-45D6-81EF-93506585AC46}" type="presOf" srcId="{D554AED9-94E6-4CA5-8AE8-D2B9DDE89938}" destId="{3E9E07FA-685D-44C5-A093-D959270CDDDD}" srcOrd="0" destOrd="2" presId="urn:microsoft.com/office/officeart/2005/8/layout/hList1"/>
-    <dgm:cxn modelId="{D73E0F4B-D9A5-47D8-BF25-DCD8CCAC8403}" srcId="{E9EC57C3-2119-49D4-9741-6FC85756EF46}" destId="{CCB94CE9-036C-4344-8F72-DC49A6C92A75}" srcOrd="0" destOrd="0" parTransId="{A2494B0C-ED24-4BC2-95CF-016ACD5557EB}" sibTransId="{C8AE6555-EEA6-48DA-9C88-A7E6F4259E1C}"/>
-    <dgm:cxn modelId="{F5D58AE2-5C24-4785-9C54-0797F0C4B170}" type="presOf" srcId="{60B28F44-6288-4FC8-92F2-4295EE218636}" destId="{972278DA-F6F2-45B6-B095-16915583DEF6}" srcOrd="0" destOrd="0" presId="urn:microsoft.com/office/officeart/2005/8/layout/hList1"/>
-    <dgm:cxn modelId="{EB2F2BE6-1C33-433D-AC03-0B9B8AF10452}" srcId="{239C9AEE-C2E9-4EB4-BC27-E84F9208AFAE}" destId="{26D0A223-316C-4307-9A6D-53698C146143}" srcOrd="1" destOrd="0" parTransId="{BE3F9E48-68B9-4D8D-A45F-058CE3216E13}" sibTransId="{BCCBAB60-4E9A-4745-BB24-0468C495AC63}"/>
-    <dgm:cxn modelId="{112BDEB0-C582-443B-A0D1-60EC812F9B2E}" type="presOf" srcId="{E9EC57C3-2119-49D4-9741-6FC85756EF46}" destId="{2CB26EB1-828E-46B1-848D-CA062BADBB52}" srcOrd="0" destOrd="0" presId="urn:microsoft.com/office/officeart/2005/8/layout/hList1"/>
     <dgm:cxn modelId="{DA23F047-DC81-4EED-945F-DC572D3D804F}" type="presOf" srcId="{7B5602D3-4FCA-4374-8A46-5584177DD9BE}" destId="{3E9E07FA-685D-44C5-A093-D959270CDDDD}" srcOrd="0" destOrd="1" presId="urn:microsoft.com/office/officeart/2005/8/layout/hList1"/>
-    <dgm:cxn modelId="{C264A46B-1A28-4B46-BDDD-F34A48040F88}" type="presOf" srcId="{711CFEDA-D059-4229-9CC6-056C16570713}" destId="{3E9E07FA-685D-44C5-A093-D959270CDDDD}" srcOrd="0" destOrd="0" presId="urn:microsoft.com/office/officeart/2005/8/layout/hList1"/>
-    <dgm:cxn modelId="{CA180A04-39F7-43E6-95D2-784BF1397271}" srcId="{F41C99E5-1E78-49F1-99AD-9DEF5CDD3CB2}" destId="{18DCD47F-0CDC-4504-BDBD-EAF994A964E3}" srcOrd="1" destOrd="0" parTransId="{506638E0-BE5F-4176-B319-E189DE4ADA57}" sibTransId="{5EA81F4A-9D2B-45A2-A0D5-B9D672897561}"/>
-    <dgm:cxn modelId="{96E18378-2386-43FD-B5B9-CE1FBCDA4427}" srcId="{E9EC57C3-2119-49D4-9741-6FC85756EF46}" destId="{F41C99E5-1E78-49F1-99AD-9DEF5CDD3CB2}" srcOrd="1" destOrd="0" parTransId="{2A3ED6A7-665B-4541-A87A-E39238198753}" sibTransId="{D95A5644-2E9C-4C46-908D-66D25A52D848}"/>
-    <dgm:cxn modelId="{6A9A4FFD-A048-45BD-9547-39CD5A318CB6}" type="presOf" srcId="{CCB94CE9-036C-4344-8F72-DC49A6C92A75}" destId="{A88D34F9-123E-4C12-846E-19AFEC648FBD}" srcOrd="0" destOrd="0" presId="urn:microsoft.com/office/officeart/2005/8/layout/hList1"/>
     <dgm:cxn modelId="{D50DA3B5-3013-4B82-AE48-2DC7AE38B2E7}" type="presOf" srcId="{3E1CF2AA-7C00-4ECB-8E8E-F9D86B073767}" destId="{972278DA-F6F2-45B6-B095-16915583DEF6}" srcOrd="0" destOrd="2" presId="urn:microsoft.com/office/officeart/2005/8/layout/hList1"/>
     <dgm:cxn modelId="{C879267E-52B6-4BFA-A244-F6D3FDD6E6F1}" srcId="{E9EC57C3-2119-49D4-9741-6FC85756EF46}" destId="{239C9AEE-C2E9-4EB4-BC27-E84F9208AFAE}" srcOrd="2" destOrd="0" parTransId="{1555087A-2149-4790-BCA2-DCD277625316}" sibTransId="{F3998774-8ECD-45AA-9734-F78649075B7F}"/>
+    <dgm:cxn modelId="{EBAD11C9-8514-4E27-8637-FADF088CE704}" type="presOf" srcId="{DF5C9C72-8944-456A-BAC3-EEF8ED867729}" destId="{887E1D47-EA7C-4DBD-AAE6-7A4E7D56A33D}" srcOrd="0" destOrd="0" presId="urn:microsoft.com/office/officeart/2005/8/layout/hList1"/>
+    <dgm:cxn modelId="{CA180A04-39F7-43E6-95D2-784BF1397271}" srcId="{F41C99E5-1E78-49F1-99AD-9DEF5CDD3CB2}" destId="{18DCD47F-0CDC-4504-BDBD-EAF994A964E3}" srcOrd="1" destOrd="0" parTransId="{506638E0-BE5F-4176-B319-E189DE4ADA57}" sibTransId="{5EA81F4A-9D2B-45A2-A0D5-B9D672897561}"/>
+    <dgm:cxn modelId="{1DCD7864-9337-4266-A69E-4331FDACB77D}" type="presOf" srcId="{18DCD47F-0CDC-4504-BDBD-EAF994A964E3}" destId="{887E1D47-EA7C-4DBD-AAE6-7A4E7D56A33D}" srcOrd="0" destOrd="1" presId="urn:microsoft.com/office/officeart/2005/8/layout/hList1"/>
+    <dgm:cxn modelId="{45376048-EDAF-47C6-8C6F-35845416CE06}" type="presOf" srcId="{26D0A223-316C-4307-9A6D-53698C146143}" destId="{972278DA-F6F2-45B6-B095-16915583DEF6}" srcOrd="0" destOrd="1" presId="urn:microsoft.com/office/officeart/2005/8/layout/hList1"/>
+    <dgm:cxn modelId="{112BDEB0-C582-443B-A0D1-60EC812F9B2E}" type="presOf" srcId="{E9EC57C3-2119-49D4-9741-6FC85756EF46}" destId="{2CB26EB1-828E-46B1-848D-CA062BADBB52}" srcOrd="0" destOrd="0" presId="urn:microsoft.com/office/officeart/2005/8/layout/hList1"/>
+    <dgm:cxn modelId="{E6C1B57D-17EB-4747-B8BB-414271199764}" type="presOf" srcId="{F41C99E5-1E78-49F1-99AD-9DEF5CDD3CB2}" destId="{C22FEDB9-95ED-45E5-987A-918B5EACA92D}" srcOrd="0" destOrd="0" presId="urn:microsoft.com/office/officeart/2005/8/layout/hList1"/>
     <dgm:cxn modelId="{82BD5E71-5F61-48C2-A25E-86C60FBCE973}" srcId="{239C9AEE-C2E9-4EB4-BC27-E84F9208AFAE}" destId="{3E1CF2AA-7C00-4ECB-8E8E-F9D86B073767}" srcOrd="2" destOrd="0" parTransId="{0A9E2ADE-EEBE-4824-A42F-454F66B1E4B7}" sibTransId="{1FFD90BB-0EBB-417E-898B-6D7030EB0B15}"/>
-    <dgm:cxn modelId="{1DCD7864-9337-4266-A69E-4331FDACB77D}" type="presOf" srcId="{18DCD47F-0CDC-4504-BDBD-EAF994A964E3}" destId="{887E1D47-EA7C-4DBD-AAE6-7A4E7D56A33D}" srcOrd="0" destOrd="1" presId="urn:microsoft.com/office/officeart/2005/8/layout/hList1"/>
+    <dgm:cxn modelId="{96E18378-2386-43FD-B5B9-CE1FBCDA4427}" srcId="{E9EC57C3-2119-49D4-9741-6FC85756EF46}" destId="{F41C99E5-1E78-49F1-99AD-9DEF5CDD3CB2}" srcOrd="1" destOrd="0" parTransId="{2A3ED6A7-665B-4541-A87A-E39238198753}" sibTransId="{D95A5644-2E9C-4C46-908D-66D25A52D848}"/>
     <dgm:cxn modelId="{F2D29E18-4A8E-4206-93E4-3087A4000065}" srcId="{CCB94CE9-036C-4344-8F72-DC49A6C92A75}" destId="{711CFEDA-D059-4229-9CC6-056C16570713}" srcOrd="0" destOrd="0" parTransId="{9064461C-5F7D-4DC4-A3F4-36788DAE0A00}" sibTransId="{F9F9B77A-12D1-4E4D-B8B9-EC7C361E0881}"/>
-    <dgm:cxn modelId="{EBAD11C9-8514-4E27-8637-FADF088CE704}" type="presOf" srcId="{DF5C9C72-8944-456A-BAC3-EEF8ED867729}" destId="{887E1D47-EA7C-4DBD-AAE6-7A4E7D56A33D}" srcOrd="0" destOrd="0" presId="urn:microsoft.com/office/officeart/2005/8/layout/hList1"/>
+    <dgm:cxn modelId="{B36BEFE1-EB5A-426C-BC4C-24539E9E4E45}" srcId="{239C9AEE-C2E9-4EB4-BC27-E84F9208AFAE}" destId="{60B28F44-6288-4FC8-92F2-4295EE218636}" srcOrd="0" destOrd="0" parTransId="{116E80BD-FC97-4C0C-BA64-581F0E4C23B4}" sibTransId="{6225A663-0CCC-4D6E-B7C3-8693CECBB933}"/>
+    <dgm:cxn modelId="{D73E0F4B-D9A5-47D8-BF25-DCD8CCAC8403}" srcId="{E9EC57C3-2119-49D4-9741-6FC85756EF46}" destId="{CCB94CE9-036C-4344-8F72-DC49A6C92A75}" srcOrd="0" destOrd="0" parTransId="{A2494B0C-ED24-4BC2-95CF-016ACD5557EB}" sibTransId="{C8AE6555-EEA6-48DA-9C88-A7E6F4259E1C}"/>
+    <dgm:cxn modelId="{6A9A4FFD-A048-45BD-9547-39CD5A318CB6}" type="presOf" srcId="{CCB94CE9-036C-4344-8F72-DC49A6C92A75}" destId="{A88D34F9-123E-4C12-846E-19AFEC648FBD}" srcOrd="0" destOrd="0" presId="urn:microsoft.com/office/officeart/2005/8/layout/hList1"/>
+    <dgm:cxn modelId="{B635D26E-8E35-44BE-9117-2803715B2102}" srcId="{CCB94CE9-036C-4344-8F72-DC49A6C92A75}" destId="{D554AED9-94E6-4CA5-8AE8-D2B9DDE89938}" srcOrd="2" destOrd="0" parTransId="{29E7511E-BCB4-4DEF-956C-F5C068A4516A}" sibTransId="{7AB50E93-C454-48A4-A3DE-289775872F74}"/>
+    <dgm:cxn modelId="{E00BAECB-881C-466B-A460-C60B35C27924}" srcId="{CCB94CE9-036C-4344-8F72-DC49A6C92A75}" destId="{7B5602D3-4FCA-4374-8A46-5584177DD9BE}" srcOrd="1" destOrd="0" parTransId="{29F65A0B-5E9F-448A-9348-501E198E9674}" sibTransId="{7AF73E08-2904-4A17-A8B8-9F02C713DC04}"/>
     <dgm:cxn modelId="{B557ECFD-4E9D-4DCB-8E83-0D70965459E1}" type="presParOf" srcId="{2CB26EB1-828E-46B1-848D-CA062BADBB52}" destId="{1E97601F-B6E7-4007-9F76-92CC8C5B4F2B}" srcOrd="0" destOrd="0" presId="urn:microsoft.com/office/officeart/2005/8/layout/hList1"/>
     <dgm:cxn modelId="{A92BCA99-8A9B-41D9-B7EB-52B4B9423C86}" type="presParOf" srcId="{1E97601F-B6E7-4007-9F76-92CC8C5B4F2B}" destId="{A88D34F9-123E-4C12-846E-19AFEC648FBD}" srcOrd="0" destOrd="0" presId="urn:microsoft.com/office/officeart/2005/8/layout/hList1"/>
     <dgm:cxn modelId="{A95D1250-341C-4EEC-8860-ED16EE95E72C}" type="presParOf" srcId="{1E97601F-B6E7-4007-9F76-92CC8C5B4F2B}" destId="{3E9E07FA-685D-44C5-A093-D959270CDDDD}" srcOrd="1" destOrd="0" presId="urn:microsoft.com/office/officeart/2005/8/layout/hList1"/>
@@ -11312,8 +11313,8 @@
     <dgm:cxn modelId="{82BD5E71-5F61-48C2-A25E-86C60FBCE973}" srcId="{239C9AEE-C2E9-4EB4-BC27-E84F9208AFAE}" destId="{3E1CF2AA-7C00-4ECB-8E8E-F9D86B073767}" srcOrd="2" destOrd="0" parTransId="{0A9E2ADE-EEBE-4824-A42F-454F66B1E4B7}" sibTransId="{1FFD90BB-0EBB-417E-898B-6D7030EB0B15}"/>
     <dgm:cxn modelId="{CB13F1FC-6EA0-4CC1-8FFE-B788E9049DC5}" type="presOf" srcId="{7B5602D3-4FCA-4374-8A46-5584177DD9BE}" destId="{3E9E07FA-685D-44C5-A093-D959270CDDDD}" srcOrd="0" destOrd="1" presId="urn:microsoft.com/office/officeart/2005/8/layout/hList1"/>
     <dgm:cxn modelId="{F2D29E18-4A8E-4206-93E4-3087A4000065}" srcId="{CCB94CE9-036C-4344-8F72-DC49A6C92A75}" destId="{711CFEDA-D059-4229-9CC6-056C16570713}" srcOrd="0" destOrd="0" parTransId="{9064461C-5F7D-4DC4-A3F4-36788DAE0A00}" sibTransId="{F9F9B77A-12D1-4E4D-B8B9-EC7C361E0881}"/>
+    <dgm:cxn modelId="{4488E612-E7C9-4FAC-B739-B8555C22FDE2}" type="presOf" srcId="{239C9AEE-C2E9-4EB4-BC27-E84F9208AFAE}" destId="{EDA5A033-B7BA-428F-ABC3-01BCAA43165C}" srcOrd="0" destOrd="0" presId="urn:microsoft.com/office/officeart/2005/8/layout/hList1"/>
     <dgm:cxn modelId="{96E18378-2386-43FD-B5B9-CE1FBCDA4427}" srcId="{E9EC57C3-2119-49D4-9741-6FC85756EF46}" destId="{F41C99E5-1E78-49F1-99AD-9DEF5CDD3CB2}" srcOrd="1" destOrd="0" parTransId="{2A3ED6A7-665B-4541-A87A-E39238198753}" sibTransId="{D95A5644-2E9C-4C46-908D-66D25A52D848}"/>
-    <dgm:cxn modelId="{4488E612-E7C9-4FAC-B739-B8555C22FDE2}" type="presOf" srcId="{239C9AEE-C2E9-4EB4-BC27-E84F9208AFAE}" destId="{EDA5A033-B7BA-428F-ABC3-01BCAA43165C}" srcOrd="0" destOrd="0" presId="urn:microsoft.com/office/officeart/2005/8/layout/hList1"/>
     <dgm:cxn modelId="{B36BEFE1-EB5A-426C-BC4C-24539E9E4E45}" srcId="{239C9AEE-C2E9-4EB4-BC27-E84F9208AFAE}" destId="{60B28F44-6288-4FC8-92F2-4295EE218636}" srcOrd="0" destOrd="0" parTransId="{116E80BD-FC97-4C0C-BA64-581F0E4C23B4}" sibTransId="{6225A663-0CCC-4D6E-B7C3-8693CECBB933}"/>
     <dgm:cxn modelId="{D73E0F4B-D9A5-47D8-BF25-DCD8CCAC8403}" srcId="{E9EC57C3-2119-49D4-9741-6FC85756EF46}" destId="{CCB94CE9-036C-4344-8F72-DC49A6C92A75}" srcOrd="0" destOrd="0" parTransId="{A2494B0C-ED24-4BC2-95CF-016ACD5557EB}" sibTransId="{C8AE6555-EEA6-48DA-9C88-A7E6F4259E1C}"/>
     <dgm:cxn modelId="{00B4A4A4-10DD-43EF-B7CE-099D92BEA24B}" type="presOf" srcId="{3E1CF2AA-7C00-4ECB-8E8E-F9D86B073767}" destId="{972278DA-F6F2-45B6-B095-16915583DEF6}" srcOrd="0" destOrd="2" presId="urn:microsoft.com/office/officeart/2005/8/layout/hList1"/>
@@ -31939,7 +31940,14 @@
           <a:bodyPr/>
           <a:lstStyle/>
           <a:p>
-            <a:endParaRPr lang="en-US" baseline="0" dirty="0" smtClean="0"/>
+            <a:r>
+              <a:rPr lang="en-US" dirty="0" smtClean="0"/>
+              <a:t>This installs POSH</a:t>
+            </a:r>
+            <a:r>
+              <a:rPr lang="en-US" baseline="0" dirty="0" smtClean="0"/>
+              <a:t> GIT, the PowerShell add-on for GIT.  Because it requires GIT, it also installs GIT.</a:t>
+            </a:r>
           </a:p>
         </p:txBody>
       </p:sp>
@@ -31969,7 +31977,7 @@
     </p:spTree>
     <p:extLst>
       <p:ext uri="{BB962C8B-B14F-4D97-AF65-F5344CB8AC3E}">
-        <p14:creationId xmlns:p14="http://schemas.microsoft.com/office/powerpoint/2010/main" val="4131591502"/>
+        <p14:creationId xmlns:p14="http://schemas.microsoft.com/office/powerpoint/2010/main" val="1777080402"/>
       </p:ext>
     </p:extLst>
   </p:cSld>
@@ -32023,14 +32031,7 @@
           <a:bodyPr/>
           <a:lstStyle/>
           <a:p>
-            <a:r>
-              <a:rPr lang="en-US" dirty="0" smtClean="0"/>
-              <a:t>This brings in my default set of aliases, and adds them to the global</a:t>
-            </a:r>
-            <a:r>
-              <a:rPr lang="en-US" baseline="0" dirty="0" smtClean="0"/>
-              <a:t> configuration.</a:t>
-            </a:r>
+            <a:endParaRPr lang="en-US" baseline="0" dirty="0" smtClean="0"/>
           </a:p>
         </p:txBody>
       </p:sp>
@@ -32060,7 +32061,7 @@
     </p:spTree>
     <p:extLst>
       <p:ext uri="{BB962C8B-B14F-4D97-AF65-F5344CB8AC3E}">
-        <p14:creationId xmlns:p14="http://schemas.microsoft.com/office/powerpoint/2010/main" val="714158959"/>
+        <p14:creationId xmlns:p14="http://schemas.microsoft.com/office/powerpoint/2010/main" val="4131591502"/>
       </p:ext>
     </p:extLst>
   </p:cSld>
@@ -32142,7 +32143,7 @@
           <a:p>
             <a:fld id="{B2E187B8-C624-4040-90CB-8B24366652AD}" type="slidenum">
               <a:rPr lang="en-US" smtClean="0"/>
-              <a:t>9</a:t>
+              <a:t>7</a:t>
             </a:fld>
             <a:endParaRPr lang="en-US"/>
           </a:p>
@@ -32151,7 +32152,7 @@
     </p:spTree>
     <p:extLst>
       <p:ext uri="{BB962C8B-B14F-4D97-AF65-F5344CB8AC3E}">
-        <p14:creationId xmlns:p14="http://schemas.microsoft.com/office/powerpoint/2010/main" val="3237887338"/>
+        <p14:creationId xmlns:p14="http://schemas.microsoft.com/office/powerpoint/2010/main" val="714158959"/>
       </p:ext>
     </p:extLst>
   </p:cSld>
@@ -32233,7 +32234,98 @@
           <a:p>
             <a:fld id="{B2E187B8-C624-4040-90CB-8B24366652AD}" type="slidenum">
               <a:rPr lang="en-US" smtClean="0"/>
-              <a:t>11</a:t>
+              <a:t>10</a:t>
+            </a:fld>
+            <a:endParaRPr lang="en-US"/>
+          </a:p>
+        </p:txBody>
+      </p:sp>
+    </p:spTree>
+    <p:extLst>
+      <p:ext uri="{BB962C8B-B14F-4D97-AF65-F5344CB8AC3E}">
+        <p14:creationId xmlns:p14="http://schemas.microsoft.com/office/powerpoint/2010/main" val="3237887338"/>
+      </p:ext>
+    </p:extLst>
+  </p:cSld>
+  <p:clrMapOvr>
+    <a:masterClrMapping/>
+  </p:clrMapOvr>
+</p:notes>
+</file>
+
+<file path=ppt/notesSlides/notesSlide6.xml><?xml version="1.0" encoding="utf-8"?>
+<p:notes xmlns:a="http://schemas.openxmlformats.org/drawingml/2006/main" xmlns:r="http://schemas.openxmlformats.org/officeDocument/2006/relationships" xmlns:p="http://schemas.openxmlformats.org/presentationml/2006/main">
+  <p:cSld>
+    <p:spTree>
+      <p:nvGrpSpPr>
+        <p:cNvPr id="1" name=""/>
+        <p:cNvGrpSpPr/>
+        <p:nvPr/>
+      </p:nvGrpSpPr>
+      <p:grpSpPr>
+        <a:xfrm>
+          <a:off x="0" y="0"/>
+          <a:ext cx="0" cy="0"/>
+          <a:chOff x="0" y="0"/>
+          <a:chExt cx="0" cy="0"/>
+        </a:xfrm>
+      </p:grpSpPr>
+      <p:sp>
+        <p:nvSpPr>
+          <p:cNvPr id="2" name="Slide Image Placeholder 1"/>
+          <p:cNvSpPr>
+            <a:spLocks noGrp="1" noRot="1" noChangeAspect="1"/>
+          </p:cNvSpPr>
+          <p:nvPr>
+            <p:ph type="sldImg"/>
+          </p:nvPr>
+        </p:nvSpPr>
+        <p:spPr/>
+      </p:sp>
+      <p:sp>
+        <p:nvSpPr>
+          <p:cNvPr id="3" name="Notes Placeholder 2"/>
+          <p:cNvSpPr>
+            <a:spLocks noGrp="1"/>
+          </p:cNvSpPr>
+          <p:nvPr>
+            <p:ph type="body" idx="1"/>
+          </p:nvPr>
+        </p:nvSpPr>
+        <p:spPr/>
+        <p:txBody>
+          <a:bodyPr/>
+          <a:lstStyle/>
+          <a:p>
+            <a:r>
+              <a:rPr lang="en-US" dirty="0" smtClean="0"/>
+              <a:t>This brings in my default set of aliases, and adds them to the global</a:t>
+            </a:r>
+            <a:r>
+              <a:rPr lang="en-US" baseline="0" dirty="0" smtClean="0"/>
+              <a:t> configuration.</a:t>
+            </a:r>
+          </a:p>
+        </p:txBody>
+      </p:sp>
+      <p:sp>
+        <p:nvSpPr>
+          <p:cNvPr id="4" name="Slide Number Placeholder 3"/>
+          <p:cNvSpPr>
+            <a:spLocks noGrp="1"/>
+          </p:cNvSpPr>
+          <p:nvPr>
+            <p:ph type="sldNum" sz="quarter" idx="10"/>
+          </p:nvPr>
+        </p:nvSpPr>
+        <p:spPr/>
+        <p:txBody>
+          <a:bodyPr/>
+          <a:lstStyle/>
+          <a:p>
+            <a:fld id="{B2E187B8-C624-4040-90CB-8B24366652AD}" type="slidenum">
+              <a:rPr lang="en-US" smtClean="0"/>
+              <a:t>12</a:t>
             </a:fld>
             <a:endParaRPr lang="en-US"/>
           </a:p>
@@ -36136,6 +36228,132 @@
           <a:p>
             <a:r>
               <a:rPr lang="en-US" dirty="0" smtClean="0"/>
+              <a:t>Creating a local repository</a:t>
+            </a:r>
+            <a:endParaRPr lang="en-US" dirty="0"/>
+          </a:p>
+        </p:txBody>
+      </p:sp>
+      <p:sp>
+        <p:nvSpPr>
+          <p:cNvPr id="3" name="Content Placeholder 2"/>
+          <p:cNvSpPr>
+            <a:spLocks noGrp="1"/>
+          </p:cNvSpPr>
+          <p:nvPr>
+            <p:ph idx="1"/>
+          </p:nvPr>
+        </p:nvSpPr>
+        <p:spPr/>
+        <p:txBody>
+          <a:bodyPr anchor="ctr">
+            <a:normAutofit/>
+          </a:bodyPr>
+          <a:lstStyle/>
+          <a:p>
+            <a:pPr algn="ctr"/>
+            <a:r>
+              <a:rPr lang="en-US" sz="3600" dirty="0" err="1" smtClean="0">
+                <a:latin typeface="Consolas" panose="020B0609020204030204" pitchFamily="49" charset="0"/>
+                <a:cs typeface="Consolas" panose="020B0609020204030204" pitchFamily="49" charset="0"/>
+              </a:rPr>
+              <a:t>mkdir</a:t>
+            </a:r>
+            <a:r>
+              <a:rPr lang="en-US" sz="3600" dirty="0" smtClean="0">
+                <a:latin typeface="Consolas" panose="020B0609020204030204" pitchFamily="49" charset="0"/>
+                <a:cs typeface="Consolas" panose="020B0609020204030204" pitchFamily="49" charset="0"/>
+              </a:rPr>
+              <a:t> c:\source\deleteme</a:t>
+            </a:r>
+          </a:p>
+          <a:p>
+            <a:pPr algn="ctr"/>
+            <a:r>
+              <a:rPr lang="en-US" sz="3600" dirty="0">
+                <a:latin typeface="Consolas" panose="020B0609020204030204" pitchFamily="49" charset="0"/>
+                <a:cs typeface="Consolas" panose="020B0609020204030204" pitchFamily="49" charset="0"/>
+              </a:rPr>
+              <a:t>cd c:\source\deleteme</a:t>
+            </a:r>
+          </a:p>
+          <a:p>
+            <a:pPr algn="ctr"/>
+            <a:r>
+              <a:rPr lang="en-US" sz="3600" dirty="0" err="1">
+                <a:latin typeface="Consolas" panose="020B0609020204030204" pitchFamily="49" charset="0"/>
+                <a:cs typeface="Consolas" panose="020B0609020204030204" pitchFamily="49" charset="0"/>
+              </a:rPr>
+              <a:t>git</a:t>
+            </a:r>
+            <a:r>
+              <a:rPr lang="en-US" sz="3600" dirty="0">
+                <a:latin typeface="Consolas" panose="020B0609020204030204" pitchFamily="49" charset="0"/>
+                <a:cs typeface="Consolas" panose="020B0609020204030204" pitchFamily="49" charset="0"/>
+              </a:rPr>
+              <a:t> </a:t>
+            </a:r>
+            <a:r>
+              <a:rPr lang="en-US" sz="3600" dirty="0" err="1">
+                <a:latin typeface="Consolas" panose="020B0609020204030204" pitchFamily="49" charset="0"/>
+                <a:cs typeface="Consolas" panose="020B0609020204030204" pitchFamily="49" charset="0"/>
+              </a:rPr>
+              <a:t>init</a:t>
+            </a:r>
+            <a:endParaRPr lang="en-US" sz="3600" dirty="0">
+              <a:latin typeface="Consolas" panose="020B0609020204030204" pitchFamily="49" charset="0"/>
+              <a:cs typeface="Consolas" panose="020B0609020204030204" pitchFamily="49" charset="0"/>
+            </a:endParaRPr>
+          </a:p>
+        </p:txBody>
+      </p:sp>
+    </p:spTree>
+    <p:extLst>
+      <p:ext uri="{BB962C8B-B14F-4D97-AF65-F5344CB8AC3E}">
+        <p14:creationId xmlns:p14="http://schemas.microsoft.com/office/powerpoint/2010/main" val="1490018585"/>
+      </p:ext>
+    </p:extLst>
+  </p:cSld>
+  <p:clrMapOvr>
+    <a:masterClrMapping/>
+  </p:clrMapOvr>
+</p:sld>
+</file>
+
+<file path=ppt/slides/slide11.xml><?xml version="1.0" encoding="utf-8"?>
+<p:sld xmlns:a="http://schemas.openxmlformats.org/drawingml/2006/main" xmlns:r="http://schemas.openxmlformats.org/officeDocument/2006/relationships" xmlns:p="http://schemas.openxmlformats.org/presentationml/2006/main">
+  <p:cSld>
+    <p:spTree>
+      <p:nvGrpSpPr>
+        <p:cNvPr id="1" name=""/>
+        <p:cNvGrpSpPr/>
+        <p:nvPr/>
+      </p:nvGrpSpPr>
+      <p:grpSpPr>
+        <a:xfrm>
+          <a:off x="0" y="0"/>
+          <a:ext cx="0" cy="0"/>
+          <a:chOff x="0" y="0"/>
+          <a:chExt cx="0" cy="0"/>
+        </a:xfrm>
+      </p:grpSpPr>
+      <p:sp>
+        <p:nvSpPr>
+          <p:cNvPr id="2" name="Title 1"/>
+          <p:cNvSpPr>
+            <a:spLocks noGrp="1"/>
+          </p:cNvSpPr>
+          <p:nvPr>
+            <p:ph type="title"/>
+          </p:nvPr>
+        </p:nvSpPr>
+        <p:spPr/>
+        <p:txBody>
+          <a:bodyPr/>
+          <a:lstStyle/>
+          <a:p>
+            <a:r>
+              <a:rPr lang="en-US" dirty="0" smtClean="0"/>
               <a:t>Writing Code Workflow</a:t>
             </a:r>
             <a:endParaRPr lang="en-US" dirty="0"/>
@@ -36180,7 +36398,7 @@
 </p:sld>
 </file>
 
-<file path=ppt/slides/slide11.xml><?xml version="1.0" encoding="utf-8"?>
+<file path=ppt/slides/slide12.xml><?xml version="1.0" encoding="utf-8"?>
 <p:sld xmlns:a="http://schemas.openxmlformats.org/drawingml/2006/main" xmlns:r="http://schemas.openxmlformats.org/officeDocument/2006/relationships" xmlns:p="http://schemas.openxmlformats.org/presentationml/2006/main">
   <p:cSld>
     <p:spTree>
@@ -36335,7 +36553,7 @@
 </p:sld>
 </file>
 
-<file path=ppt/slides/slide12.xml><?xml version="1.0" encoding="utf-8"?>
+<file path=ppt/slides/slide13.xml><?xml version="1.0" encoding="utf-8"?>
 <p:sld xmlns:a="http://schemas.openxmlformats.org/drawingml/2006/main" xmlns:r="http://schemas.openxmlformats.org/officeDocument/2006/relationships" xmlns:p="http://schemas.openxmlformats.org/presentationml/2006/main">
   <p:cSld>
     <p:spTree>
@@ -36413,7 +36631,7 @@
 </p:sld>
 </file>
 
-<file path=ppt/slides/slide13.xml><?xml version="1.0" encoding="utf-8"?>
+<file path=ppt/slides/slide14.xml><?xml version="1.0" encoding="utf-8"?>
 <p:sld xmlns:a="http://schemas.openxmlformats.org/drawingml/2006/main" xmlns:r="http://schemas.openxmlformats.org/officeDocument/2006/relationships" xmlns:p="http://schemas.openxmlformats.org/presentationml/2006/main">
   <p:cSld>
     <p:spTree>
@@ -36491,7 +36709,7 @@
 </p:sld>
 </file>
 
-<file path=ppt/slides/slide14.xml><?xml version="1.0" encoding="utf-8"?>
+<file path=ppt/slides/slide15.xml><?xml version="1.0" encoding="utf-8"?>
 <p:sld xmlns:a="http://schemas.openxmlformats.org/drawingml/2006/main" xmlns:r="http://schemas.openxmlformats.org/officeDocument/2006/relationships" xmlns:p="http://schemas.openxmlformats.org/presentationml/2006/main">
   <p:cSld>
     <p:spTree>
@@ -36634,7 +36852,7 @@
 </p:sld>
 </file>
 
-<file path=ppt/slides/slide15.xml><?xml version="1.0" encoding="utf-8"?>
+<file path=ppt/slides/slide16.xml><?xml version="1.0" encoding="utf-8"?>
 <p:sld xmlns:a="http://schemas.openxmlformats.org/drawingml/2006/main" xmlns:r="http://schemas.openxmlformats.org/officeDocument/2006/relationships" xmlns:p="http://schemas.openxmlformats.org/presentationml/2006/main">
   <p:cSld>
     <p:spTree>
@@ -36710,7 +36928,7 @@
 </p:sld>
 </file>
 
-<file path=ppt/slides/slide16.xml><?xml version="1.0" encoding="utf-8"?>
+<file path=ppt/slides/slide17.xml><?xml version="1.0" encoding="utf-8"?>
 <p:sld xmlns:a="http://schemas.openxmlformats.org/drawingml/2006/main" xmlns:r="http://schemas.openxmlformats.org/officeDocument/2006/relationships" xmlns:p="http://schemas.openxmlformats.org/presentationml/2006/main">
   <p:cSld>
     <p:spTree>
@@ -36932,7 +37150,7 @@
 </p:sld>
 </file>
 
-<file path=ppt/slides/slide17.xml><?xml version="1.0" encoding="utf-8"?>
+<file path=ppt/slides/slide18.xml><?xml version="1.0" encoding="utf-8"?>
 <p:sld xmlns:a="http://schemas.openxmlformats.org/drawingml/2006/main" xmlns:r="http://schemas.openxmlformats.org/officeDocument/2006/relationships" xmlns:p="http://schemas.openxmlformats.org/presentationml/2006/main">
   <p:cSld>
     <p:spTree>
@@ -37064,7 +37282,7 @@
 </p:sld>
 </file>
 
-<file path=ppt/slides/slide18.xml><?xml version="1.0" encoding="utf-8"?>
+<file path=ppt/slides/slide19.xml><?xml version="1.0" encoding="utf-8"?>
 <p:sld xmlns:a="http://schemas.openxmlformats.org/drawingml/2006/main" xmlns:r="http://schemas.openxmlformats.org/officeDocument/2006/relationships" xmlns:p="http://schemas.openxmlformats.org/presentationml/2006/main">
   <p:cSld>
     <p:spTree>
@@ -37234,116 +37452,6 @@
     <p:extLst>
       <p:ext uri="{BB962C8B-B14F-4D97-AF65-F5344CB8AC3E}">
         <p14:creationId xmlns:p14="http://schemas.microsoft.com/office/powerpoint/2010/main" val="1857187999"/>
-      </p:ext>
-    </p:extLst>
-  </p:cSld>
-  <p:clrMapOvr>
-    <a:masterClrMapping/>
-  </p:clrMapOvr>
-</p:sld>
-</file>
-
-<file path=ppt/slides/slide19.xml><?xml version="1.0" encoding="utf-8"?>
-<p:sld xmlns:a="http://schemas.openxmlformats.org/drawingml/2006/main" xmlns:r="http://schemas.openxmlformats.org/officeDocument/2006/relationships" xmlns:p="http://schemas.openxmlformats.org/presentationml/2006/main">
-  <p:cSld>
-    <p:spTree>
-      <p:nvGrpSpPr>
-        <p:cNvPr id="1" name=""/>
-        <p:cNvGrpSpPr/>
-        <p:nvPr/>
-      </p:nvGrpSpPr>
-      <p:grpSpPr>
-        <a:xfrm>
-          <a:off x="0" y="0"/>
-          <a:ext cx="0" cy="0"/>
-          <a:chOff x="0" y="0"/>
-          <a:chExt cx="0" cy="0"/>
-        </a:xfrm>
-      </p:grpSpPr>
-      <p:sp>
-        <p:nvSpPr>
-          <p:cNvPr id="2" name="Title 1"/>
-          <p:cNvSpPr>
-            <a:spLocks noGrp="1"/>
-          </p:cNvSpPr>
-          <p:nvPr>
-            <p:ph type="title"/>
-          </p:nvPr>
-        </p:nvSpPr>
-        <p:spPr/>
-        <p:txBody>
-          <a:bodyPr/>
-          <a:lstStyle/>
-          <a:p>
-            <a:r>
-              <a:rPr lang="en-US" dirty="0"/>
-              <a:t>Branch per Feature Workflow</a:t>
-            </a:r>
-          </a:p>
-        </p:txBody>
-      </p:sp>
-      <p:sp>
-        <p:nvSpPr>
-          <p:cNvPr id="3" name="Content Placeholder 2"/>
-          <p:cNvSpPr>
-            <a:spLocks noGrp="1"/>
-          </p:cNvSpPr>
-          <p:nvPr>
-            <p:ph idx="1"/>
-          </p:nvPr>
-        </p:nvSpPr>
-        <p:spPr/>
-        <p:txBody>
-          <a:bodyPr anchor="ctr">
-            <a:normAutofit/>
-          </a:bodyPr>
-          <a:lstStyle/>
-          <a:p>
-            <a:pPr algn="ctr"/>
-            <a:r>
-              <a:rPr lang="en-US" sz="4800" dirty="0" smtClean="0"/>
-              <a:t>Branches are cheap and easy</a:t>
-            </a:r>
-          </a:p>
-          <a:p>
-            <a:pPr algn="ctr"/>
-            <a:r>
-              <a:rPr lang="en-US" sz="4800" dirty="0" smtClean="0"/>
-              <a:t>So create &amp; destroy them often</a:t>
-            </a:r>
-          </a:p>
-          <a:p>
-            <a:pPr algn="ctr"/>
-            <a:r>
-              <a:rPr lang="en-US" sz="4800" dirty="0" smtClean="0"/>
-              <a:t>Don’t use </a:t>
-            </a:r>
-            <a:r>
-              <a:rPr lang="en-US" sz="4800" b="1" dirty="0" smtClean="0"/>
-              <a:t>master</a:t>
-            </a:r>
-            <a:r>
-              <a:rPr lang="en-US" sz="4800" dirty="0" smtClean="0"/>
-              <a:t>, branch to </a:t>
-            </a:r>
-            <a:r>
-              <a:rPr lang="en-US" sz="4800" b="1" dirty="0" smtClean="0"/>
-              <a:t>working</a:t>
-            </a:r>
-          </a:p>
-          <a:p>
-            <a:pPr algn="ctr"/>
-            <a:r>
-              <a:rPr lang="en-US" sz="4800" b="1" dirty="0" smtClean="0"/>
-              <a:t>(I’ll explain why later)</a:t>
-            </a:r>
-          </a:p>
-        </p:txBody>
-      </p:sp>
-    </p:spTree>
-    <p:extLst>
-      <p:ext uri="{BB962C8B-B14F-4D97-AF65-F5344CB8AC3E}">
-        <p14:creationId xmlns:p14="http://schemas.microsoft.com/office/powerpoint/2010/main" val="2656857468"/>
       </p:ext>
     </p:extLst>
   </p:cSld>
@@ -37568,6 +37676,116 @@
           <a:lstStyle/>
           <a:p>
             <a:r>
+              <a:rPr lang="en-US" dirty="0"/>
+              <a:t>Branch per Feature Workflow</a:t>
+            </a:r>
+          </a:p>
+        </p:txBody>
+      </p:sp>
+      <p:sp>
+        <p:nvSpPr>
+          <p:cNvPr id="3" name="Content Placeholder 2"/>
+          <p:cNvSpPr>
+            <a:spLocks noGrp="1"/>
+          </p:cNvSpPr>
+          <p:nvPr>
+            <p:ph idx="1"/>
+          </p:nvPr>
+        </p:nvSpPr>
+        <p:spPr/>
+        <p:txBody>
+          <a:bodyPr anchor="ctr">
+            <a:normAutofit/>
+          </a:bodyPr>
+          <a:lstStyle/>
+          <a:p>
+            <a:pPr algn="ctr"/>
+            <a:r>
+              <a:rPr lang="en-US" sz="4800" dirty="0" smtClean="0"/>
+              <a:t>Branches are cheap and easy</a:t>
+            </a:r>
+          </a:p>
+          <a:p>
+            <a:pPr algn="ctr"/>
+            <a:r>
+              <a:rPr lang="en-US" sz="4800" dirty="0" smtClean="0"/>
+              <a:t>So create &amp; destroy them often</a:t>
+            </a:r>
+          </a:p>
+          <a:p>
+            <a:pPr algn="ctr"/>
+            <a:r>
+              <a:rPr lang="en-US" sz="4800" dirty="0" smtClean="0"/>
+              <a:t>Don’t use </a:t>
+            </a:r>
+            <a:r>
+              <a:rPr lang="en-US" sz="4800" b="1" dirty="0" smtClean="0"/>
+              <a:t>master</a:t>
+            </a:r>
+            <a:r>
+              <a:rPr lang="en-US" sz="4800" dirty="0" smtClean="0"/>
+              <a:t>, branch to </a:t>
+            </a:r>
+            <a:r>
+              <a:rPr lang="en-US" sz="4800" b="1" dirty="0" smtClean="0"/>
+              <a:t>working</a:t>
+            </a:r>
+          </a:p>
+          <a:p>
+            <a:pPr algn="ctr"/>
+            <a:r>
+              <a:rPr lang="en-US" sz="4800" b="1" dirty="0" smtClean="0"/>
+              <a:t>(I’ll explain why later)</a:t>
+            </a:r>
+          </a:p>
+        </p:txBody>
+      </p:sp>
+    </p:spTree>
+    <p:extLst>
+      <p:ext uri="{BB962C8B-B14F-4D97-AF65-F5344CB8AC3E}">
+        <p14:creationId xmlns:p14="http://schemas.microsoft.com/office/powerpoint/2010/main" val="2656857468"/>
+      </p:ext>
+    </p:extLst>
+  </p:cSld>
+  <p:clrMapOvr>
+    <a:masterClrMapping/>
+  </p:clrMapOvr>
+</p:sld>
+</file>
+
+<file path=ppt/slides/slide21.xml><?xml version="1.0" encoding="utf-8"?>
+<p:sld xmlns:a="http://schemas.openxmlformats.org/drawingml/2006/main" xmlns:r="http://schemas.openxmlformats.org/officeDocument/2006/relationships" xmlns:p="http://schemas.openxmlformats.org/presentationml/2006/main">
+  <p:cSld>
+    <p:spTree>
+      <p:nvGrpSpPr>
+        <p:cNvPr id="1" name=""/>
+        <p:cNvGrpSpPr/>
+        <p:nvPr/>
+      </p:nvGrpSpPr>
+      <p:grpSpPr>
+        <a:xfrm>
+          <a:off x="0" y="0"/>
+          <a:ext cx="0" cy="0"/>
+          <a:chOff x="0" y="0"/>
+          <a:chExt cx="0" cy="0"/>
+        </a:xfrm>
+      </p:grpSpPr>
+      <p:sp>
+        <p:nvSpPr>
+          <p:cNvPr id="2" name="Title 1"/>
+          <p:cNvSpPr>
+            <a:spLocks noGrp="1"/>
+          </p:cNvSpPr>
+          <p:nvPr>
+            <p:ph type="title"/>
+          </p:nvPr>
+        </p:nvSpPr>
+        <p:spPr/>
+        <p:txBody>
+          <a:bodyPr/>
+          <a:lstStyle/>
+          <a:p>
+            <a:r>
               <a:rPr lang="en-US" dirty="0" smtClean="0"/>
               <a:t>Branch per Feature Workflow</a:t>
             </a:r>
@@ -37613,7 +37831,7 @@
 </p:sld>
 </file>
 
-<file path=ppt/slides/slide21.xml><?xml version="1.0" encoding="utf-8"?>
+<file path=ppt/slides/slide22.xml><?xml version="1.0" encoding="utf-8"?>
 <p:sld xmlns:a="http://schemas.openxmlformats.org/drawingml/2006/main" xmlns:r="http://schemas.openxmlformats.org/officeDocument/2006/relationships" xmlns:p="http://schemas.openxmlformats.org/presentationml/2006/main">
   <p:cSld>
     <p:spTree>
@@ -37691,7 +37909,7 @@
 </p:sld>
 </file>
 
-<file path=ppt/slides/slide22.xml><?xml version="1.0" encoding="utf-8"?>
+<file path=ppt/slides/slide23.xml><?xml version="1.0" encoding="utf-8"?>
 <p:sld xmlns:a="http://schemas.openxmlformats.org/drawingml/2006/main" xmlns:r="http://schemas.openxmlformats.org/officeDocument/2006/relationships" xmlns:p="http://schemas.openxmlformats.org/presentationml/2006/main">
   <p:cSld>
     <p:spTree>
@@ -37861,7 +38079,7 @@
 </p:sld>
 </file>
 
-<file path=ppt/slides/slide23.xml><?xml version="1.0" encoding="utf-8"?>
+<file path=ppt/slides/slide24.xml><?xml version="1.0" encoding="utf-8"?>
 <p:sld xmlns:a="http://schemas.openxmlformats.org/drawingml/2006/main" xmlns:r="http://schemas.openxmlformats.org/officeDocument/2006/relationships" xmlns:p="http://schemas.openxmlformats.org/presentationml/2006/main">
   <p:cSld>
     <p:spTree>
@@ -37970,7 +38188,7 @@
 </p:sld>
 </file>
 
-<file path=ppt/slides/slide24.xml><?xml version="1.0" encoding="utf-8"?>
+<file path=ppt/slides/slide25.xml><?xml version="1.0" encoding="utf-8"?>
 <p:sld xmlns:a="http://schemas.openxmlformats.org/drawingml/2006/main" xmlns:r="http://schemas.openxmlformats.org/officeDocument/2006/relationships" xmlns:p="http://schemas.openxmlformats.org/presentationml/2006/main">
   <p:cSld>
     <p:spTree>
@@ -38046,7 +38264,7 @@
 </p:sld>
 </file>
 
-<file path=ppt/slides/slide25.xml><?xml version="1.0" encoding="utf-8"?>
+<file path=ppt/slides/slide26.xml><?xml version="1.0" encoding="utf-8"?>
 <p:sld xmlns:a="http://schemas.openxmlformats.org/drawingml/2006/main" xmlns:r="http://schemas.openxmlformats.org/officeDocument/2006/relationships" xmlns:p="http://schemas.openxmlformats.org/presentationml/2006/main">
   <p:cSld>
     <p:spTree>
@@ -38106,7 +38324,7 @@
 </p:sld>
 </file>
 
-<file path=ppt/slides/slide26.xml><?xml version="1.0" encoding="utf-8"?>
+<file path=ppt/slides/slide27.xml><?xml version="1.0" encoding="utf-8"?>
 <p:sld xmlns:a="http://schemas.openxmlformats.org/drawingml/2006/main" xmlns:r="http://schemas.openxmlformats.org/officeDocument/2006/relationships" xmlns:p="http://schemas.openxmlformats.org/presentationml/2006/main">
   <p:cSld>
     <p:spTree>
@@ -38259,7 +38477,7 @@
 </p:sld>
 </file>
 
-<file path=ppt/slides/slide27.xml><?xml version="1.0" encoding="utf-8"?>
+<file path=ppt/slides/slide28.xml><?xml version="1.0" encoding="utf-8"?>
 <p:sld xmlns:a="http://schemas.openxmlformats.org/drawingml/2006/main" xmlns:r="http://schemas.openxmlformats.org/officeDocument/2006/relationships" xmlns:p="http://schemas.openxmlformats.org/presentationml/2006/main">
   <p:cSld>
     <p:spTree>
@@ -38371,7 +38589,7 @@
 </p:sld>
 </file>
 
-<file path=ppt/slides/slide28.xml><?xml version="1.0" encoding="utf-8"?>
+<file path=ppt/slides/slide29.xml><?xml version="1.0" encoding="utf-8"?>
 <p:sld xmlns:a="http://schemas.openxmlformats.org/drawingml/2006/main" xmlns:r="http://schemas.openxmlformats.org/officeDocument/2006/relationships" xmlns:p="http://schemas.openxmlformats.org/presentationml/2006/main">
   <p:cSld>
     <p:spTree>
@@ -38581,81 +38799,6 @@
 </p:sld>
 </file>
 
-<file path=ppt/slides/slide29.xml><?xml version="1.0" encoding="utf-8"?>
-<p:sld xmlns:a="http://schemas.openxmlformats.org/drawingml/2006/main" xmlns:r="http://schemas.openxmlformats.org/officeDocument/2006/relationships" xmlns:p="http://schemas.openxmlformats.org/presentationml/2006/main">
-  <p:cSld>
-    <p:spTree>
-      <p:nvGrpSpPr>
-        <p:cNvPr id="1" name=""/>
-        <p:cNvGrpSpPr/>
-        <p:nvPr/>
-      </p:nvGrpSpPr>
-      <p:grpSpPr>
-        <a:xfrm>
-          <a:off x="0" y="0"/>
-          <a:ext cx="0" cy="0"/>
-          <a:chOff x="0" y="0"/>
-          <a:chExt cx="0" cy="0"/>
-        </a:xfrm>
-      </p:grpSpPr>
-      <p:sp>
-        <p:nvSpPr>
-          <p:cNvPr id="4" name="Title 3"/>
-          <p:cNvSpPr>
-            <a:spLocks noGrp="1"/>
-          </p:cNvSpPr>
-          <p:nvPr>
-            <p:ph type="ctrTitle"/>
-          </p:nvPr>
-        </p:nvSpPr>
-        <p:spPr/>
-        <p:txBody>
-          <a:bodyPr/>
-          <a:lstStyle/>
-          <a:p>
-            <a:r>
-              <a:rPr lang="en-US" b="1" dirty="0" smtClean="0"/>
-              <a:t>Questions &amp; Answers</a:t>
-            </a:r>
-            <a:endParaRPr lang="en-US" dirty="0"/>
-          </a:p>
-        </p:txBody>
-      </p:sp>
-      <p:sp>
-        <p:nvSpPr>
-          <p:cNvPr id="5" name="Subtitle 4"/>
-          <p:cNvSpPr>
-            <a:spLocks noGrp="1"/>
-          </p:cNvSpPr>
-          <p:nvPr>
-            <p:ph type="subTitle" idx="1"/>
-          </p:nvPr>
-        </p:nvSpPr>
-        <p:spPr/>
-        <p:txBody>
-          <a:bodyPr/>
-          <a:lstStyle/>
-          <a:p>
-            <a:r>
-              <a:rPr lang="en-US" dirty="0"/>
-              <a:t>GIT on your box</a:t>
-            </a:r>
-          </a:p>
-        </p:txBody>
-      </p:sp>
-    </p:spTree>
-    <p:extLst>
-      <p:ext uri="{BB962C8B-B14F-4D97-AF65-F5344CB8AC3E}">
-        <p14:creationId xmlns:p14="http://schemas.microsoft.com/office/powerpoint/2010/main" val="4136060439"/>
-      </p:ext>
-    </p:extLst>
-  </p:cSld>
-  <p:clrMapOvr>
-    <a:masterClrMapping/>
-  </p:clrMapOvr>
-</p:sld>
-</file>
-
 <file path=ppt/slides/slide3.xml><?xml version="1.0" encoding="utf-8"?>
 <p:sld xmlns:a="http://schemas.openxmlformats.org/drawingml/2006/main" xmlns:r="http://schemas.openxmlformats.org/officeDocument/2006/relationships" xmlns:p="http://schemas.openxmlformats.org/presentationml/2006/main">
   <p:cSld>
@@ -38755,6 +38898,81 @@
             <a:spLocks noGrp="1"/>
           </p:cNvSpPr>
           <p:nvPr>
+            <p:ph type="ctrTitle"/>
+          </p:nvPr>
+        </p:nvSpPr>
+        <p:spPr/>
+        <p:txBody>
+          <a:bodyPr/>
+          <a:lstStyle/>
+          <a:p>
+            <a:r>
+              <a:rPr lang="en-US" b="1" dirty="0" smtClean="0"/>
+              <a:t>Questions &amp; Answers</a:t>
+            </a:r>
+            <a:endParaRPr lang="en-US" dirty="0"/>
+          </a:p>
+        </p:txBody>
+      </p:sp>
+      <p:sp>
+        <p:nvSpPr>
+          <p:cNvPr id="5" name="Subtitle 4"/>
+          <p:cNvSpPr>
+            <a:spLocks noGrp="1"/>
+          </p:cNvSpPr>
+          <p:nvPr>
+            <p:ph type="subTitle" idx="1"/>
+          </p:nvPr>
+        </p:nvSpPr>
+        <p:spPr/>
+        <p:txBody>
+          <a:bodyPr/>
+          <a:lstStyle/>
+          <a:p>
+            <a:r>
+              <a:rPr lang="en-US" dirty="0"/>
+              <a:t>GIT on your box</a:t>
+            </a:r>
+          </a:p>
+        </p:txBody>
+      </p:sp>
+    </p:spTree>
+    <p:extLst>
+      <p:ext uri="{BB962C8B-B14F-4D97-AF65-F5344CB8AC3E}">
+        <p14:creationId xmlns:p14="http://schemas.microsoft.com/office/powerpoint/2010/main" val="4136060439"/>
+      </p:ext>
+    </p:extLst>
+  </p:cSld>
+  <p:clrMapOvr>
+    <a:masterClrMapping/>
+  </p:clrMapOvr>
+</p:sld>
+</file>
+
+<file path=ppt/slides/slide31.xml><?xml version="1.0" encoding="utf-8"?>
+<p:sld xmlns:a="http://schemas.openxmlformats.org/drawingml/2006/main" xmlns:r="http://schemas.openxmlformats.org/officeDocument/2006/relationships" xmlns:p="http://schemas.openxmlformats.org/presentationml/2006/main">
+  <p:cSld>
+    <p:spTree>
+      <p:nvGrpSpPr>
+        <p:cNvPr id="1" name=""/>
+        <p:cNvGrpSpPr/>
+        <p:nvPr/>
+      </p:nvGrpSpPr>
+      <p:grpSpPr>
+        <a:xfrm>
+          <a:off x="0" y="0"/>
+          <a:ext cx="0" cy="0"/>
+          <a:chOff x="0" y="0"/>
+          <a:chExt cx="0" cy="0"/>
+        </a:xfrm>
+      </p:grpSpPr>
+      <p:sp>
+        <p:nvSpPr>
+          <p:cNvPr id="4" name="Title 3"/>
+          <p:cNvSpPr>
+            <a:spLocks noGrp="1"/>
+          </p:cNvSpPr>
+          <p:nvPr>
             <p:ph type="title"/>
           </p:nvPr>
         </p:nvSpPr>
@@ -38807,7 +39025,7 @@
 </p:sld>
 </file>
 
-<file path=ppt/slides/slide31.xml><?xml version="1.0" encoding="utf-8"?>
+<file path=ppt/slides/slide32.xml><?xml version="1.0" encoding="utf-8"?>
 <p:sld xmlns:a="http://schemas.openxmlformats.org/drawingml/2006/main" xmlns:r="http://schemas.openxmlformats.org/officeDocument/2006/relationships" xmlns:p="http://schemas.openxmlformats.org/presentationml/2006/main">
   <p:cSld>
     <p:spTree>
@@ -38985,7 +39203,7 @@
 </p:sld>
 </file>
 
-<file path=ppt/slides/slide32.xml><?xml version="1.0" encoding="utf-8"?>
+<file path=ppt/slides/slide33.xml><?xml version="1.0" encoding="utf-8"?>
 <p:sld xmlns:a="http://schemas.openxmlformats.org/drawingml/2006/main" xmlns:r="http://schemas.openxmlformats.org/officeDocument/2006/relationships" xmlns:p="http://schemas.openxmlformats.org/presentationml/2006/main">
   <p:cSld>
     <p:spTree>
@@ -39063,7 +39281,7 @@
 </p:sld>
 </file>
 
-<file path=ppt/slides/slide33.xml><?xml version="1.0" encoding="utf-8"?>
+<file path=ppt/slides/slide34.xml><?xml version="1.0" encoding="utf-8"?>
 <p:sld xmlns:a="http://schemas.openxmlformats.org/drawingml/2006/main" xmlns:r="http://schemas.openxmlformats.org/officeDocument/2006/relationships" xmlns:p="http://schemas.openxmlformats.org/presentationml/2006/main">
   <p:cSld>
     <p:spTree>
@@ -39141,7 +39359,7 @@
 </p:sld>
 </file>
 
-<file path=ppt/slides/slide34.xml><?xml version="1.0" encoding="utf-8"?>
+<file path=ppt/slides/slide35.xml><?xml version="1.0" encoding="utf-8"?>
 <p:sld xmlns:a="http://schemas.openxmlformats.org/drawingml/2006/main" xmlns:r="http://schemas.openxmlformats.org/officeDocument/2006/relationships" xmlns:p="http://schemas.openxmlformats.org/presentationml/2006/main">
   <p:cSld>
     <p:spTree>
@@ -39254,7 +39472,7 @@
 </p:sld>
 </file>
 
-<file path=ppt/slides/slide35.xml><?xml version="1.0" encoding="utf-8"?>
+<file path=ppt/slides/slide36.xml><?xml version="1.0" encoding="utf-8"?>
 <p:sld xmlns:a="http://schemas.openxmlformats.org/drawingml/2006/main" xmlns:r="http://schemas.openxmlformats.org/officeDocument/2006/relationships" xmlns:p="http://schemas.openxmlformats.org/presentationml/2006/main">
   <p:cSld>
     <p:spTree>
@@ -39444,7 +39662,7 @@
 </p:sld>
 </file>
 
-<file path=ppt/slides/slide36.xml><?xml version="1.0" encoding="utf-8"?>
+<file path=ppt/slides/slide37.xml><?xml version="1.0" encoding="utf-8"?>
 <p:sld xmlns:a="http://schemas.openxmlformats.org/drawingml/2006/main" xmlns:r="http://schemas.openxmlformats.org/officeDocument/2006/relationships" xmlns:p="http://schemas.openxmlformats.org/presentationml/2006/main">
   <p:cSld>
     <p:spTree>
@@ -39683,7 +39901,7 @@
 </p:sld>
 </file>
 
-<file path=ppt/slides/slide37.xml><?xml version="1.0" encoding="utf-8"?>
+<file path=ppt/slides/slide38.xml><?xml version="1.0" encoding="utf-8"?>
 <p:sld xmlns:a="http://schemas.openxmlformats.org/drawingml/2006/main" xmlns:r="http://schemas.openxmlformats.org/officeDocument/2006/relationships" xmlns:p="http://schemas.openxmlformats.org/presentationml/2006/main">
   <p:cSld>
     <p:spTree>
@@ -39759,7 +39977,7 @@
 </p:sld>
 </file>
 
-<file path=ppt/slides/slide38.xml><?xml version="1.0" encoding="utf-8"?>
+<file path=ppt/slides/slide39.xml><?xml version="1.0" encoding="utf-8"?>
 <p:sld xmlns:a="http://schemas.openxmlformats.org/drawingml/2006/main" xmlns:r="http://schemas.openxmlformats.org/officeDocument/2006/relationships" xmlns:p="http://schemas.openxmlformats.org/presentationml/2006/main">
   <p:cSld>
     <p:spTree>
@@ -39924,7 +40142,174 @@
 </p:sld>
 </file>
 
-<file path=ppt/slides/slide39.xml><?xml version="1.0" encoding="utf-8"?>
+<file path=ppt/slides/slide4.xml><?xml version="1.0" encoding="utf-8"?>
+<p:sld xmlns:a="http://schemas.openxmlformats.org/drawingml/2006/main" xmlns:r="http://schemas.openxmlformats.org/officeDocument/2006/relationships" xmlns:p="http://schemas.openxmlformats.org/presentationml/2006/main">
+  <p:cSld>
+    <p:spTree>
+      <p:nvGrpSpPr>
+        <p:cNvPr id="1" name=""/>
+        <p:cNvGrpSpPr/>
+        <p:nvPr/>
+      </p:nvGrpSpPr>
+      <p:grpSpPr>
+        <a:xfrm>
+          <a:off x="0" y="0"/>
+          <a:ext cx="0" cy="0"/>
+          <a:chOff x="0" y="0"/>
+          <a:chExt cx="0" cy="0"/>
+        </a:xfrm>
+      </p:grpSpPr>
+      <p:sp>
+        <p:nvSpPr>
+          <p:cNvPr id="2" name="Title 1"/>
+          <p:cNvSpPr>
+            <a:spLocks noGrp="1"/>
+          </p:cNvSpPr>
+          <p:nvPr>
+            <p:ph type="title"/>
+          </p:nvPr>
+        </p:nvSpPr>
+        <p:spPr/>
+        <p:txBody>
+          <a:bodyPr/>
+          <a:lstStyle/>
+          <a:p>
+            <a:r>
+              <a:rPr lang="en-US" dirty="0" smtClean="0"/>
+              <a:t>Do I have </a:t>
+            </a:r>
+            <a:r>
+              <a:rPr lang="en-US" dirty="0" err="1" smtClean="0"/>
+              <a:t>Git</a:t>
+            </a:r>
+            <a:r>
+              <a:rPr lang="en-US" dirty="0" smtClean="0"/>
+              <a:t> installed?</a:t>
+            </a:r>
+            <a:endParaRPr lang="en-US" dirty="0"/>
+          </a:p>
+        </p:txBody>
+      </p:sp>
+      <p:sp>
+        <p:nvSpPr>
+          <p:cNvPr id="3" name="Content Placeholder 2"/>
+          <p:cNvSpPr>
+            <a:spLocks noGrp="1"/>
+          </p:cNvSpPr>
+          <p:nvPr>
+            <p:ph idx="1"/>
+          </p:nvPr>
+        </p:nvSpPr>
+        <p:spPr/>
+        <p:txBody>
+          <a:bodyPr anchor="ctr">
+            <a:normAutofit/>
+          </a:bodyPr>
+          <a:lstStyle/>
+          <a:p>
+            <a:pPr algn="ctr"/>
+            <a:r>
+              <a:rPr lang="en-US" sz="3600" dirty="0" smtClean="0">
+                <a:solidFill>
+                  <a:srgbClr val="00B050"/>
+                </a:solidFill>
+                <a:latin typeface="Consolas" panose="020B0609020204030204" pitchFamily="49" charset="0"/>
+                <a:cs typeface="Consolas" panose="020B0609020204030204" pitchFamily="49" charset="0"/>
+              </a:rPr>
+              <a:t># In Terminal</a:t>
+            </a:r>
+            <a:endParaRPr lang="en-US" sz="3600" dirty="0" smtClean="0">
+              <a:latin typeface="Consolas" panose="020B0609020204030204" pitchFamily="49" charset="0"/>
+              <a:cs typeface="Consolas" panose="020B0609020204030204" pitchFamily="49" charset="0"/>
+            </a:endParaRPr>
+          </a:p>
+          <a:p>
+            <a:pPr algn="ctr"/>
+            <a:r>
+              <a:rPr lang="en-US" sz="3600" dirty="0" err="1" smtClean="0">
+                <a:latin typeface="Consolas" panose="020B0609020204030204" pitchFamily="49" charset="0"/>
+                <a:cs typeface="Consolas" panose="020B0609020204030204" pitchFamily="49" charset="0"/>
+              </a:rPr>
+              <a:t>g</a:t>
+            </a:r>
+            <a:r>
+              <a:rPr lang="en-US" sz="3600" dirty="0" err="1" smtClean="0">
+                <a:latin typeface="Consolas" panose="020B0609020204030204" pitchFamily="49" charset="0"/>
+                <a:cs typeface="Consolas" panose="020B0609020204030204" pitchFamily="49" charset="0"/>
+              </a:rPr>
+              <a:t>it</a:t>
+            </a:r>
+            <a:r>
+              <a:rPr lang="en-US" sz="3600" dirty="0" smtClean="0">
+                <a:latin typeface="Consolas" panose="020B0609020204030204" pitchFamily="49" charset="0"/>
+                <a:cs typeface="Consolas" panose="020B0609020204030204" pitchFamily="49" charset="0"/>
+              </a:rPr>
+              <a:t> --version</a:t>
+            </a:r>
+          </a:p>
+          <a:p>
+            <a:pPr algn="ctr"/>
+            <a:r>
+              <a:rPr lang="en-US" sz="3600" dirty="0">
+                <a:solidFill>
+                  <a:srgbClr val="00B050"/>
+                </a:solidFill>
+                <a:latin typeface="Consolas" panose="020B0609020204030204" pitchFamily="49" charset="0"/>
+                <a:cs typeface="Consolas" panose="020B0609020204030204" pitchFamily="49" charset="0"/>
+              </a:rPr>
+              <a:t># </a:t>
+            </a:r>
+            <a:r>
+              <a:rPr lang="en-US" sz="3600" dirty="0" smtClean="0">
+                <a:solidFill>
+                  <a:srgbClr val="00B050"/>
+                </a:solidFill>
+                <a:latin typeface="Consolas" panose="020B0609020204030204" pitchFamily="49" charset="0"/>
+                <a:cs typeface="Consolas" panose="020B0609020204030204" pitchFamily="49" charset="0"/>
+              </a:rPr>
+              <a:t>Should return the version of </a:t>
+            </a:r>
+            <a:r>
+              <a:rPr lang="en-US" sz="3600" dirty="0" err="1" smtClean="0">
+                <a:solidFill>
+                  <a:srgbClr val="00B050"/>
+                </a:solidFill>
+                <a:latin typeface="Consolas" panose="020B0609020204030204" pitchFamily="49" charset="0"/>
+                <a:cs typeface="Consolas" panose="020B0609020204030204" pitchFamily="49" charset="0"/>
+              </a:rPr>
+              <a:t>Git</a:t>
+            </a:r>
+            <a:r>
+              <a:rPr lang="en-US" sz="3600" dirty="0" smtClean="0">
+                <a:solidFill>
+                  <a:srgbClr val="00B050"/>
+                </a:solidFill>
+                <a:latin typeface="Consolas" panose="020B0609020204030204" pitchFamily="49" charset="0"/>
+                <a:cs typeface="Consolas" panose="020B0609020204030204" pitchFamily="49" charset="0"/>
+              </a:rPr>
+              <a:t> if installed</a:t>
+            </a:r>
+            <a:endParaRPr lang="en-US" sz="3600" dirty="0" smtClean="0">
+              <a:latin typeface="Consolas" panose="020B0609020204030204" pitchFamily="49" charset="0"/>
+              <a:cs typeface="Consolas" panose="020B0609020204030204" pitchFamily="49" charset="0"/>
+            </a:endParaRPr>
+          </a:p>
+        </p:txBody>
+      </p:sp>
+    </p:spTree>
+    <p:extLst>
+      <p:ext uri="{BB962C8B-B14F-4D97-AF65-F5344CB8AC3E}">
+        <p14:creationId xmlns:p14="http://schemas.microsoft.com/office/powerpoint/2010/main" val="2829960024"/>
+      </p:ext>
+    </p:extLst>
+  </p:cSld>
+  <p:clrMapOvr>
+    <a:masterClrMapping/>
+  </p:clrMapOvr>
+</p:sld>
+</file>
+
+<file path=ppt/slides/slide40.xml><?xml version="1.0" encoding="utf-8"?>
 <p:sld xmlns:a="http://schemas.openxmlformats.org/drawingml/2006/main" xmlns:r="http://schemas.openxmlformats.org/officeDocument/2006/relationships" xmlns:p="http://schemas.openxmlformats.org/presentationml/2006/main">
   <p:cSld>
     <p:spTree>
@@ -40000,7 +40385,379 @@
 </p:sld>
 </file>
 
-<file path=ppt/slides/slide4.xml><?xml version="1.0" encoding="utf-8"?>
+<file path=ppt/slides/slide41.xml><?xml version="1.0" encoding="utf-8"?>
+<p:sld xmlns:a="http://schemas.openxmlformats.org/drawingml/2006/main" xmlns:r="http://schemas.openxmlformats.org/officeDocument/2006/relationships" xmlns:p="http://schemas.openxmlformats.org/presentationml/2006/main">
+  <p:cSld>
+    <p:spTree>
+      <p:nvGrpSpPr>
+        <p:cNvPr id="1" name=""/>
+        <p:cNvGrpSpPr/>
+        <p:nvPr/>
+      </p:nvGrpSpPr>
+      <p:grpSpPr>
+        <a:xfrm>
+          <a:off x="0" y="0"/>
+          <a:ext cx="0" cy="0"/>
+          <a:chOff x="0" y="0"/>
+          <a:chExt cx="0" cy="0"/>
+        </a:xfrm>
+      </p:grpSpPr>
+      <p:sp>
+        <p:nvSpPr>
+          <p:cNvPr id="4" name="Title 3"/>
+          <p:cNvSpPr>
+            <a:spLocks noGrp="1"/>
+          </p:cNvSpPr>
+          <p:nvPr>
+            <p:ph type="title"/>
+          </p:nvPr>
+        </p:nvSpPr>
+        <p:spPr/>
+        <p:txBody>
+          <a:bodyPr/>
+          <a:lstStyle/>
+          <a:p>
+            <a:r>
+              <a:rPr lang="en-US" dirty="0" smtClean="0"/>
+              <a:t>Get changes from a remote</a:t>
+            </a:r>
+            <a:endParaRPr lang="en-US" dirty="0"/>
+          </a:p>
+        </p:txBody>
+      </p:sp>
+      <p:sp>
+        <p:nvSpPr>
+          <p:cNvPr id="6" name="Content Placeholder 2"/>
+          <p:cNvSpPr>
+            <a:spLocks noGrp="1"/>
+          </p:cNvSpPr>
+          <p:nvPr>
+            <p:ph idx="1"/>
+          </p:nvPr>
+        </p:nvSpPr>
+        <p:spPr/>
+        <p:txBody>
+          <a:bodyPr anchor="ctr"/>
+          <a:lstStyle/>
+          <a:p>
+            <a:pPr algn="ctr"/>
+            <a:r>
+              <a:rPr lang="en-US" sz="3600" dirty="0" err="1" smtClean="0">
+                <a:latin typeface="Consolas" panose="020B0609020204030204" pitchFamily="49" charset="0"/>
+                <a:cs typeface="Consolas" panose="020B0609020204030204" pitchFamily="49" charset="0"/>
+              </a:rPr>
+              <a:t>git</a:t>
+            </a:r>
+            <a:r>
+              <a:rPr lang="en-US" sz="3600" dirty="0" smtClean="0">
+                <a:latin typeface="Consolas" panose="020B0609020204030204" pitchFamily="49" charset="0"/>
+                <a:cs typeface="Consolas" panose="020B0609020204030204" pitchFamily="49" charset="0"/>
+              </a:rPr>
+              <a:t> pull </a:t>
+            </a:r>
+            <a:r>
+              <a:rPr lang="en-US" sz="3600" dirty="0" smtClean="0">
+                <a:solidFill>
+                  <a:srgbClr val="00B050"/>
+                </a:solidFill>
+                <a:latin typeface="Consolas" panose="020B0609020204030204" pitchFamily="49" charset="0"/>
+                <a:cs typeface="Consolas" panose="020B0609020204030204" pitchFamily="49" charset="0"/>
+              </a:rPr>
+              <a:t>&lt;remote&gt;</a:t>
+            </a:r>
+            <a:r>
+              <a:rPr lang="en-US" sz="3600" dirty="0" smtClean="0">
+                <a:latin typeface="Consolas" panose="020B0609020204030204" pitchFamily="49" charset="0"/>
+                <a:cs typeface="Consolas" panose="020B0609020204030204" pitchFamily="49" charset="0"/>
+              </a:rPr>
+              <a:t> </a:t>
+            </a:r>
+            <a:r>
+              <a:rPr lang="en-US" sz="3600" dirty="0" smtClean="0">
+                <a:solidFill>
+                  <a:srgbClr val="00B050"/>
+                </a:solidFill>
+                <a:latin typeface="Consolas" panose="020B0609020204030204" pitchFamily="49" charset="0"/>
+                <a:cs typeface="Consolas" panose="020B0609020204030204" pitchFamily="49" charset="0"/>
+              </a:rPr>
+              <a:t>&lt;branch&gt;</a:t>
+            </a:r>
+          </a:p>
+        </p:txBody>
+      </p:sp>
+    </p:spTree>
+    <p:extLst>
+      <p:ext uri="{BB962C8B-B14F-4D97-AF65-F5344CB8AC3E}">
+        <p14:creationId xmlns:p14="http://schemas.microsoft.com/office/powerpoint/2010/main" val="3733919796"/>
+      </p:ext>
+    </p:extLst>
+  </p:cSld>
+  <p:clrMapOvr>
+    <a:masterClrMapping/>
+  </p:clrMapOvr>
+</p:sld>
+</file>
+
+<file path=ppt/slides/slide42.xml><?xml version="1.0" encoding="utf-8"?>
+<p:sld xmlns:a="http://schemas.openxmlformats.org/drawingml/2006/main" xmlns:r="http://schemas.openxmlformats.org/officeDocument/2006/relationships" xmlns:p="http://schemas.openxmlformats.org/presentationml/2006/main">
+  <p:cSld>
+    <p:spTree>
+      <p:nvGrpSpPr>
+        <p:cNvPr id="1" name=""/>
+        <p:cNvGrpSpPr/>
+        <p:nvPr/>
+      </p:nvGrpSpPr>
+      <p:grpSpPr>
+        <a:xfrm>
+          <a:off x="0" y="0"/>
+          <a:ext cx="0" cy="0"/>
+          <a:chOff x="0" y="0"/>
+          <a:chExt cx="0" cy="0"/>
+        </a:xfrm>
+      </p:grpSpPr>
+      <p:sp>
+        <p:nvSpPr>
+          <p:cNvPr id="2" name="Title 1"/>
+          <p:cNvSpPr>
+            <a:spLocks noGrp="1"/>
+          </p:cNvSpPr>
+          <p:nvPr>
+            <p:ph type="title"/>
+          </p:nvPr>
+        </p:nvSpPr>
+        <p:spPr/>
+        <p:txBody>
+          <a:bodyPr/>
+          <a:lstStyle/>
+          <a:p>
+            <a:r>
+              <a:rPr lang="en-US" dirty="0" smtClean="0"/>
+              <a:t>Merge Conflicts</a:t>
+            </a:r>
+            <a:endParaRPr lang="en-US" dirty="0"/>
+          </a:p>
+        </p:txBody>
+      </p:sp>
+      <p:graphicFrame>
+        <p:nvGraphicFramePr>
+          <p:cNvPr id="4" name="Content Placeholder 3"/>
+          <p:cNvGraphicFramePr>
+            <a:graphicFrameLocks noGrp="1"/>
+          </p:cNvGraphicFramePr>
+          <p:nvPr>
+            <p:ph idx="1"/>
+            <p:extLst>
+              <p:ext uri="{D42A27DB-BD31-4B8C-83A1-F6EECF244321}">
+                <p14:modId xmlns:p14="http://schemas.microsoft.com/office/powerpoint/2010/main" val="1767341546"/>
+              </p:ext>
+            </p:extLst>
+          </p:nvPr>
+        </p:nvGraphicFramePr>
+        <p:xfrm>
+          <a:off x="1096963" y="1846263"/>
+          <a:ext cx="10058400" cy="4022725"/>
+        </p:xfrm>
+        <a:graphic>
+          <a:graphicData uri="http://schemas.openxmlformats.org/drawingml/2006/diagram">
+            <dgm:relIds xmlns:dgm="http://schemas.openxmlformats.org/drawingml/2006/diagram" xmlns:r="http://schemas.openxmlformats.org/officeDocument/2006/relationships" r:dm="rId2" r:lo="rId3" r:qs="rId4" r:cs="rId5"/>
+          </a:graphicData>
+        </a:graphic>
+      </p:graphicFrame>
+    </p:spTree>
+    <p:extLst>
+      <p:ext uri="{BB962C8B-B14F-4D97-AF65-F5344CB8AC3E}">
+        <p14:creationId xmlns:p14="http://schemas.microsoft.com/office/powerpoint/2010/main" val="1106208532"/>
+      </p:ext>
+    </p:extLst>
+  </p:cSld>
+  <p:clrMapOvr>
+    <a:masterClrMapping/>
+  </p:clrMapOvr>
+</p:sld>
+</file>
+
+<file path=ppt/slides/slide43.xml><?xml version="1.0" encoding="utf-8"?>
+<p:sld xmlns:a="http://schemas.openxmlformats.org/drawingml/2006/main" xmlns:r="http://schemas.openxmlformats.org/officeDocument/2006/relationships" xmlns:p="http://schemas.openxmlformats.org/presentationml/2006/main">
+  <p:cSld>
+    <p:spTree>
+      <p:nvGrpSpPr>
+        <p:cNvPr id="1" name=""/>
+        <p:cNvGrpSpPr/>
+        <p:nvPr/>
+      </p:nvGrpSpPr>
+      <p:grpSpPr>
+        <a:xfrm>
+          <a:off x="0" y="0"/>
+          <a:ext cx="0" cy="0"/>
+          <a:chOff x="0" y="0"/>
+          <a:chExt cx="0" cy="0"/>
+        </a:xfrm>
+      </p:grpSpPr>
+      <p:sp>
+        <p:nvSpPr>
+          <p:cNvPr id="2" name="Title 1"/>
+          <p:cNvSpPr>
+            <a:spLocks noGrp="1"/>
+          </p:cNvSpPr>
+          <p:nvPr>
+            <p:ph type="title"/>
+          </p:nvPr>
+        </p:nvSpPr>
+        <p:spPr/>
+        <p:txBody>
+          <a:bodyPr/>
+          <a:lstStyle/>
+          <a:p>
+            <a:r>
+              <a:rPr lang="en-US" dirty="0" smtClean="0"/>
+              <a:t>Merge Conflicts</a:t>
+            </a:r>
+            <a:endParaRPr lang="en-US" dirty="0"/>
+          </a:p>
+        </p:txBody>
+      </p:sp>
+      <p:graphicFrame>
+        <p:nvGraphicFramePr>
+          <p:cNvPr id="4" name="Content Placeholder 3"/>
+          <p:cNvGraphicFramePr>
+            <a:graphicFrameLocks noGrp="1"/>
+          </p:cNvGraphicFramePr>
+          <p:nvPr>
+            <p:ph idx="1"/>
+            <p:extLst>
+              <p:ext uri="{D42A27DB-BD31-4B8C-83A1-F6EECF244321}">
+                <p14:modId xmlns:p14="http://schemas.microsoft.com/office/powerpoint/2010/main" val="3753904496"/>
+              </p:ext>
+            </p:extLst>
+          </p:nvPr>
+        </p:nvGraphicFramePr>
+        <p:xfrm>
+          <a:off x="1096963" y="1846263"/>
+          <a:ext cx="10058400" cy="4022725"/>
+        </p:xfrm>
+        <a:graphic>
+          <a:graphicData uri="http://schemas.openxmlformats.org/drawingml/2006/diagram">
+            <dgm:relIds xmlns:dgm="http://schemas.openxmlformats.org/drawingml/2006/diagram" xmlns:r="http://schemas.openxmlformats.org/officeDocument/2006/relationships" r:dm="rId2" r:lo="rId3" r:qs="rId4" r:cs="rId5"/>
+          </a:graphicData>
+        </a:graphic>
+      </p:graphicFrame>
+    </p:spTree>
+    <p:extLst>
+      <p:ext uri="{BB962C8B-B14F-4D97-AF65-F5344CB8AC3E}">
+        <p14:creationId xmlns:p14="http://schemas.microsoft.com/office/powerpoint/2010/main" val="489621973"/>
+      </p:ext>
+    </p:extLst>
+  </p:cSld>
+  <p:clrMapOvr>
+    <a:masterClrMapping/>
+  </p:clrMapOvr>
+</p:sld>
+</file>
+
+<file path=ppt/slides/slide44.xml><?xml version="1.0" encoding="utf-8"?>
+<p:sld xmlns:a="http://schemas.openxmlformats.org/drawingml/2006/main" xmlns:r="http://schemas.openxmlformats.org/officeDocument/2006/relationships" xmlns:p="http://schemas.openxmlformats.org/presentationml/2006/main">
+  <p:cSld>
+    <p:spTree>
+      <p:nvGrpSpPr>
+        <p:cNvPr id="1" name=""/>
+        <p:cNvGrpSpPr/>
+        <p:nvPr/>
+      </p:nvGrpSpPr>
+      <p:grpSpPr>
+        <a:xfrm>
+          <a:off x="0" y="0"/>
+          <a:ext cx="0" cy="0"/>
+          <a:chOff x="0" y="0"/>
+          <a:chExt cx="0" cy="0"/>
+        </a:xfrm>
+      </p:grpSpPr>
+      <p:sp>
+        <p:nvSpPr>
+          <p:cNvPr id="2" name="Title 1"/>
+          <p:cNvSpPr>
+            <a:spLocks noGrp="1"/>
+          </p:cNvSpPr>
+          <p:nvPr>
+            <p:ph type="title"/>
+          </p:nvPr>
+        </p:nvSpPr>
+        <p:spPr/>
+        <p:txBody>
+          <a:bodyPr/>
+          <a:lstStyle/>
+          <a:p>
+            <a:r>
+              <a:rPr lang="en-US" dirty="0" smtClean="0"/>
+              <a:t>GIT Cheat Sheets</a:t>
+            </a:r>
+            <a:endParaRPr lang="en-US" dirty="0"/>
+          </a:p>
+        </p:txBody>
+      </p:sp>
+      <p:sp>
+        <p:nvSpPr>
+          <p:cNvPr id="3" name="Content Placeholder 2"/>
+          <p:cNvSpPr>
+            <a:spLocks noGrp="1"/>
+          </p:cNvSpPr>
+          <p:nvPr>
+            <p:ph idx="1"/>
+          </p:nvPr>
+        </p:nvSpPr>
+        <p:spPr/>
+        <p:txBody>
+          <a:bodyPr anchor="ctr">
+            <a:normAutofit/>
+          </a:bodyPr>
+          <a:lstStyle/>
+          <a:p>
+            <a:pPr algn="ctr"/>
+            <a:r>
+              <a:rPr lang="en-US" sz="4000" dirty="0">
+                <a:hlinkClick r:id="rId2"/>
+              </a:rPr>
+              <a:t>http://ndpsoftware.com/git-</a:t>
+            </a:r>
+            <a:r>
+              <a:rPr lang="en-US" sz="4000" dirty="0" smtClean="0">
+                <a:hlinkClick r:id="rId2"/>
+              </a:rPr>
+              <a:t>cheatsheet.html</a:t>
+            </a:r>
+            <a:endParaRPr lang="en-US" sz="4000" dirty="0" smtClean="0"/>
+          </a:p>
+          <a:p>
+            <a:pPr algn="ctr"/>
+            <a:r>
+              <a:rPr lang="en-US" sz="4000" dirty="0">
+                <a:hlinkClick r:id="rId3"/>
+              </a:rPr>
+              <a:t>http://rogerdudler.github.io/git-guide</a:t>
+            </a:r>
+            <a:r>
+              <a:rPr lang="en-US" sz="4000" dirty="0" smtClean="0">
+                <a:hlinkClick r:id="rId3"/>
+              </a:rPr>
+              <a:t>/</a:t>
+            </a:r>
+            <a:endParaRPr lang="en-US" sz="4000" dirty="0" smtClean="0"/>
+          </a:p>
+        </p:txBody>
+      </p:sp>
+    </p:spTree>
+    <p:extLst>
+      <p:ext uri="{BB962C8B-B14F-4D97-AF65-F5344CB8AC3E}">
+        <p14:creationId xmlns:p14="http://schemas.microsoft.com/office/powerpoint/2010/main" val="1873894209"/>
+      </p:ext>
+    </p:extLst>
+  </p:cSld>
+  <p:clrMapOvr>
+    <a:masterClrMapping/>
+  </p:clrMapOvr>
+</p:sld>
+</file>
+
+<file path=ppt/slides/slide5.xml><?xml version="1.0" encoding="utf-8"?>
 <p:sld xmlns:a="http://schemas.openxmlformats.org/drawingml/2006/main" xmlns:r="http://schemas.openxmlformats.org/officeDocument/2006/relationships" xmlns:p="http://schemas.openxmlformats.org/presentationml/2006/main">
   <p:cSld>
     <p:spTree>
@@ -40176,7 +40933,7 @@
     </p:spTree>
     <p:extLst>
       <p:ext uri="{BB962C8B-B14F-4D97-AF65-F5344CB8AC3E}">
-        <p14:creationId xmlns:p14="http://schemas.microsoft.com/office/powerpoint/2010/main" val="2829960024"/>
+        <p14:creationId xmlns:p14="http://schemas.microsoft.com/office/powerpoint/2010/main" val="1225295666"/>
       </p:ext>
     </p:extLst>
   </p:cSld>
@@ -40186,379 +40943,7 @@
 </p:sld>
 </file>
 
-<file path=ppt/slides/slide40.xml><?xml version="1.0" encoding="utf-8"?>
-<p:sld xmlns:a="http://schemas.openxmlformats.org/drawingml/2006/main" xmlns:r="http://schemas.openxmlformats.org/officeDocument/2006/relationships" xmlns:p="http://schemas.openxmlformats.org/presentationml/2006/main">
-  <p:cSld>
-    <p:spTree>
-      <p:nvGrpSpPr>
-        <p:cNvPr id="1" name=""/>
-        <p:cNvGrpSpPr/>
-        <p:nvPr/>
-      </p:nvGrpSpPr>
-      <p:grpSpPr>
-        <a:xfrm>
-          <a:off x="0" y="0"/>
-          <a:ext cx="0" cy="0"/>
-          <a:chOff x="0" y="0"/>
-          <a:chExt cx="0" cy="0"/>
-        </a:xfrm>
-      </p:grpSpPr>
-      <p:sp>
-        <p:nvSpPr>
-          <p:cNvPr id="4" name="Title 3"/>
-          <p:cNvSpPr>
-            <a:spLocks noGrp="1"/>
-          </p:cNvSpPr>
-          <p:nvPr>
-            <p:ph type="title"/>
-          </p:nvPr>
-        </p:nvSpPr>
-        <p:spPr/>
-        <p:txBody>
-          <a:bodyPr/>
-          <a:lstStyle/>
-          <a:p>
-            <a:r>
-              <a:rPr lang="en-US" dirty="0" smtClean="0"/>
-              <a:t>Get changes from a remote</a:t>
-            </a:r>
-            <a:endParaRPr lang="en-US" dirty="0"/>
-          </a:p>
-        </p:txBody>
-      </p:sp>
-      <p:sp>
-        <p:nvSpPr>
-          <p:cNvPr id="6" name="Content Placeholder 2"/>
-          <p:cNvSpPr>
-            <a:spLocks noGrp="1"/>
-          </p:cNvSpPr>
-          <p:nvPr>
-            <p:ph idx="1"/>
-          </p:nvPr>
-        </p:nvSpPr>
-        <p:spPr/>
-        <p:txBody>
-          <a:bodyPr anchor="ctr"/>
-          <a:lstStyle/>
-          <a:p>
-            <a:pPr algn="ctr"/>
-            <a:r>
-              <a:rPr lang="en-US" sz="3600" dirty="0" err="1" smtClean="0">
-                <a:latin typeface="Consolas" panose="020B0609020204030204" pitchFamily="49" charset="0"/>
-                <a:cs typeface="Consolas" panose="020B0609020204030204" pitchFamily="49" charset="0"/>
-              </a:rPr>
-              <a:t>git</a:t>
-            </a:r>
-            <a:r>
-              <a:rPr lang="en-US" sz="3600" dirty="0" smtClean="0">
-                <a:latin typeface="Consolas" panose="020B0609020204030204" pitchFamily="49" charset="0"/>
-                <a:cs typeface="Consolas" panose="020B0609020204030204" pitchFamily="49" charset="0"/>
-              </a:rPr>
-              <a:t> pull </a:t>
-            </a:r>
-            <a:r>
-              <a:rPr lang="en-US" sz="3600" dirty="0" smtClean="0">
-                <a:solidFill>
-                  <a:srgbClr val="00B050"/>
-                </a:solidFill>
-                <a:latin typeface="Consolas" panose="020B0609020204030204" pitchFamily="49" charset="0"/>
-                <a:cs typeface="Consolas" panose="020B0609020204030204" pitchFamily="49" charset="0"/>
-              </a:rPr>
-              <a:t>&lt;remote&gt;</a:t>
-            </a:r>
-            <a:r>
-              <a:rPr lang="en-US" sz="3600" dirty="0" smtClean="0">
-                <a:latin typeface="Consolas" panose="020B0609020204030204" pitchFamily="49" charset="0"/>
-                <a:cs typeface="Consolas" panose="020B0609020204030204" pitchFamily="49" charset="0"/>
-              </a:rPr>
-              <a:t> </a:t>
-            </a:r>
-            <a:r>
-              <a:rPr lang="en-US" sz="3600" dirty="0" smtClean="0">
-                <a:solidFill>
-                  <a:srgbClr val="00B050"/>
-                </a:solidFill>
-                <a:latin typeface="Consolas" panose="020B0609020204030204" pitchFamily="49" charset="0"/>
-                <a:cs typeface="Consolas" panose="020B0609020204030204" pitchFamily="49" charset="0"/>
-              </a:rPr>
-              <a:t>&lt;branch&gt;</a:t>
-            </a:r>
-          </a:p>
-        </p:txBody>
-      </p:sp>
-    </p:spTree>
-    <p:extLst>
-      <p:ext uri="{BB962C8B-B14F-4D97-AF65-F5344CB8AC3E}">
-        <p14:creationId xmlns:p14="http://schemas.microsoft.com/office/powerpoint/2010/main" val="3733919796"/>
-      </p:ext>
-    </p:extLst>
-  </p:cSld>
-  <p:clrMapOvr>
-    <a:masterClrMapping/>
-  </p:clrMapOvr>
-</p:sld>
-</file>
-
-<file path=ppt/slides/slide41.xml><?xml version="1.0" encoding="utf-8"?>
-<p:sld xmlns:a="http://schemas.openxmlformats.org/drawingml/2006/main" xmlns:r="http://schemas.openxmlformats.org/officeDocument/2006/relationships" xmlns:p="http://schemas.openxmlformats.org/presentationml/2006/main">
-  <p:cSld>
-    <p:spTree>
-      <p:nvGrpSpPr>
-        <p:cNvPr id="1" name=""/>
-        <p:cNvGrpSpPr/>
-        <p:nvPr/>
-      </p:nvGrpSpPr>
-      <p:grpSpPr>
-        <a:xfrm>
-          <a:off x="0" y="0"/>
-          <a:ext cx="0" cy="0"/>
-          <a:chOff x="0" y="0"/>
-          <a:chExt cx="0" cy="0"/>
-        </a:xfrm>
-      </p:grpSpPr>
-      <p:sp>
-        <p:nvSpPr>
-          <p:cNvPr id="2" name="Title 1"/>
-          <p:cNvSpPr>
-            <a:spLocks noGrp="1"/>
-          </p:cNvSpPr>
-          <p:nvPr>
-            <p:ph type="title"/>
-          </p:nvPr>
-        </p:nvSpPr>
-        <p:spPr/>
-        <p:txBody>
-          <a:bodyPr/>
-          <a:lstStyle/>
-          <a:p>
-            <a:r>
-              <a:rPr lang="en-US" dirty="0" smtClean="0"/>
-              <a:t>Merge Conflicts</a:t>
-            </a:r>
-            <a:endParaRPr lang="en-US" dirty="0"/>
-          </a:p>
-        </p:txBody>
-      </p:sp>
-      <p:graphicFrame>
-        <p:nvGraphicFramePr>
-          <p:cNvPr id="4" name="Content Placeholder 3"/>
-          <p:cNvGraphicFramePr>
-            <a:graphicFrameLocks noGrp="1"/>
-          </p:cNvGraphicFramePr>
-          <p:nvPr>
-            <p:ph idx="1"/>
-            <p:extLst>
-              <p:ext uri="{D42A27DB-BD31-4B8C-83A1-F6EECF244321}">
-                <p14:modId xmlns:p14="http://schemas.microsoft.com/office/powerpoint/2010/main" val="1767341546"/>
-              </p:ext>
-            </p:extLst>
-          </p:nvPr>
-        </p:nvGraphicFramePr>
-        <p:xfrm>
-          <a:off x="1096963" y="1846263"/>
-          <a:ext cx="10058400" cy="4022725"/>
-        </p:xfrm>
-        <a:graphic>
-          <a:graphicData uri="http://schemas.openxmlformats.org/drawingml/2006/diagram">
-            <dgm:relIds xmlns:dgm="http://schemas.openxmlformats.org/drawingml/2006/diagram" xmlns:r="http://schemas.openxmlformats.org/officeDocument/2006/relationships" r:dm="rId2" r:lo="rId3" r:qs="rId4" r:cs="rId5"/>
-          </a:graphicData>
-        </a:graphic>
-      </p:graphicFrame>
-    </p:spTree>
-    <p:extLst>
-      <p:ext uri="{BB962C8B-B14F-4D97-AF65-F5344CB8AC3E}">
-        <p14:creationId xmlns:p14="http://schemas.microsoft.com/office/powerpoint/2010/main" val="1106208532"/>
-      </p:ext>
-    </p:extLst>
-  </p:cSld>
-  <p:clrMapOvr>
-    <a:masterClrMapping/>
-  </p:clrMapOvr>
-</p:sld>
-</file>
-
-<file path=ppt/slides/slide42.xml><?xml version="1.0" encoding="utf-8"?>
-<p:sld xmlns:a="http://schemas.openxmlformats.org/drawingml/2006/main" xmlns:r="http://schemas.openxmlformats.org/officeDocument/2006/relationships" xmlns:p="http://schemas.openxmlformats.org/presentationml/2006/main">
-  <p:cSld>
-    <p:spTree>
-      <p:nvGrpSpPr>
-        <p:cNvPr id="1" name=""/>
-        <p:cNvGrpSpPr/>
-        <p:nvPr/>
-      </p:nvGrpSpPr>
-      <p:grpSpPr>
-        <a:xfrm>
-          <a:off x="0" y="0"/>
-          <a:ext cx="0" cy="0"/>
-          <a:chOff x="0" y="0"/>
-          <a:chExt cx="0" cy="0"/>
-        </a:xfrm>
-      </p:grpSpPr>
-      <p:sp>
-        <p:nvSpPr>
-          <p:cNvPr id="2" name="Title 1"/>
-          <p:cNvSpPr>
-            <a:spLocks noGrp="1"/>
-          </p:cNvSpPr>
-          <p:nvPr>
-            <p:ph type="title"/>
-          </p:nvPr>
-        </p:nvSpPr>
-        <p:spPr/>
-        <p:txBody>
-          <a:bodyPr/>
-          <a:lstStyle/>
-          <a:p>
-            <a:r>
-              <a:rPr lang="en-US" dirty="0" smtClean="0"/>
-              <a:t>Merge Conflicts</a:t>
-            </a:r>
-            <a:endParaRPr lang="en-US" dirty="0"/>
-          </a:p>
-        </p:txBody>
-      </p:sp>
-      <p:graphicFrame>
-        <p:nvGraphicFramePr>
-          <p:cNvPr id="4" name="Content Placeholder 3"/>
-          <p:cNvGraphicFramePr>
-            <a:graphicFrameLocks noGrp="1"/>
-          </p:cNvGraphicFramePr>
-          <p:nvPr>
-            <p:ph idx="1"/>
-            <p:extLst>
-              <p:ext uri="{D42A27DB-BD31-4B8C-83A1-F6EECF244321}">
-                <p14:modId xmlns:p14="http://schemas.microsoft.com/office/powerpoint/2010/main" val="3753904496"/>
-              </p:ext>
-            </p:extLst>
-          </p:nvPr>
-        </p:nvGraphicFramePr>
-        <p:xfrm>
-          <a:off x="1096963" y="1846263"/>
-          <a:ext cx="10058400" cy="4022725"/>
-        </p:xfrm>
-        <a:graphic>
-          <a:graphicData uri="http://schemas.openxmlformats.org/drawingml/2006/diagram">
-            <dgm:relIds xmlns:dgm="http://schemas.openxmlformats.org/drawingml/2006/diagram" xmlns:r="http://schemas.openxmlformats.org/officeDocument/2006/relationships" r:dm="rId2" r:lo="rId3" r:qs="rId4" r:cs="rId5"/>
-          </a:graphicData>
-        </a:graphic>
-      </p:graphicFrame>
-    </p:spTree>
-    <p:extLst>
-      <p:ext uri="{BB962C8B-B14F-4D97-AF65-F5344CB8AC3E}">
-        <p14:creationId xmlns:p14="http://schemas.microsoft.com/office/powerpoint/2010/main" val="489621973"/>
-      </p:ext>
-    </p:extLst>
-  </p:cSld>
-  <p:clrMapOvr>
-    <a:masterClrMapping/>
-  </p:clrMapOvr>
-</p:sld>
-</file>
-
-<file path=ppt/slides/slide43.xml><?xml version="1.0" encoding="utf-8"?>
-<p:sld xmlns:a="http://schemas.openxmlformats.org/drawingml/2006/main" xmlns:r="http://schemas.openxmlformats.org/officeDocument/2006/relationships" xmlns:p="http://schemas.openxmlformats.org/presentationml/2006/main">
-  <p:cSld>
-    <p:spTree>
-      <p:nvGrpSpPr>
-        <p:cNvPr id="1" name=""/>
-        <p:cNvGrpSpPr/>
-        <p:nvPr/>
-      </p:nvGrpSpPr>
-      <p:grpSpPr>
-        <a:xfrm>
-          <a:off x="0" y="0"/>
-          <a:ext cx="0" cy="0"/>
-          <a:chOff x="0" y="0"/>
-          <a:chExt cx="0" cy="0"/>
-        </a:xfrm>
-      </p:grpSpPr>
-      <p:sp>
-        <p:nvSpPr>
-          <p:cNvPr id="2" name="Title 1"/>
-          <p:cNvSpPr>
-            <a:spLocks noGrp="1"/>
-          </p:cNvSpPr>
-          <p:nvPr>
-            <p:ph type="title"/>
-          </p:nvPr>
-        </p:nvSpPr>
-        <p:spPr/>
-        <p:txBody>
-          <a:bodyPr/>
-          <a:lstStyle/>
-          <a:p>
-            <a:r>
-              <a:rPr lang="en-US" dirty="0" smtClean="0"/>
-              <a:t>GIT Cheat Sheets</a:t>
-            </a:r>
-            <a:endParaRPr lang="en-US" dirty="0"/>
-          </a:p>
-        </p:txBody>
-      </p:sp>
-      <p:sp>
-        <p:nvSpPr>
-          <p:cNvPr id="3" name="Content Placeholder 2"/>
-          <p:cNvSpPr>
-            <a:spLocks noGrp="1"/>
-          </p:cNvSpPr>
-          <p:nvPr>
-            <p:ph idx="1"/>
-          </p:nvPr>
-        </p:nvSpPr>
-        <p:spPr/>
-        <p:txBody>
-          <a:bodyPr anchor="ctr">
-            <a:normAutofit/>
-          </a:bodyPr>
-          <a:lstStyle/>
-          <a:p>
-            <a:pPr algn="ctr"/>
-            <a:r>
-              <a:rPr lang="en-US" sz="4000" dirty="0">
-                <a:hlinkClick r:id="rId2"/>
-              </a:rPr>
-              <a:t>http://ndpsoftware.com/git-</a:t>
-            </a:r>
-            <a:r>
-              <a:rPr lang="en-US" sz="4000" dirty="0" smtClean="0">
-                <a:hlinkClick r:id="rId2"/>
-              </a:rPr>
-              <a:t>cheatsheet.html</a:t>
-            </a:r>
-            <a:endParaRPr lang="en-US" sz="4000" dirty="0" smtClean="0"/>
-          </a:p>
-          <a:p>
-            <a:pPr algn="ctr"/>
-            <a:r>
-              <a:rPr lang="en-US" sz="4000" dirty="0">
-                <a:hlinkClick r:id="rId3"/>
-              </a:rPr>
-              <a:t>http://rogerdudler.github.io/git-guide</a:t>
-            </a:r>
-            <a:r>
-              <a:rPr lang="en-US" sz="4000" dirty="0" smtClean="0">
-                <a:hlinkClick r:id="rId3"/>
-              </a:rPr>
-              <a:t>/</a:t>
-            </a:r>
-            <a:endParaRPr lang="en-US" sz="4000" dirty="0" smtClean="0"/>
-          </a:p>
-        </p:txBody>
-      </p:sp>
-    </p:spTree>
-    <p:extLst>
-      <p:ext uri="{BB962C8B-B14F-4D97-AF65-F5344CB8AC3E}">
-        <p14:creationId xmlns:p14="http://schemas.microsoft.com/office/powerpoint/2010/main" val="1873894209"/>
-      </p:ext>
-    </p:extLst>
-  </p:cSld>
-  <p:clrMapOvr>
-    <a:masterClrMapping/>
-  </p:clrMapOvr>
-</p:sld>
-</file>
-
-<file path=ppt/slides/slide5.xml><?xml version="1.0" encoding="utf-8"?>
+<file path=ppt/slides/slide6.xml><?xml version="1.0" encoding="utf-8"?>
 <p:sld xmlns:a="http://schemas.openxmlformats.org/drawingml/2006/main" xmlns:r="http://schemas.openxmlformats.org/officeDocument/2006/relationships" xmlns:p="http://schemas.openxmlformats.org/presentationml/2006/main">
   <p:cSld>
     <p:spTree>
@@ -40725,7 +41110,7 @@
 </p:sld>
 </file>
 
-<file path=ppt/slides/slide6.xml><?xml version="1.0" encoding="utf-8"?>
+<file path=ppt/slides/slide7.xml><?xml version="1.0" encoding="utf-8"?>
 <p:sld xmlns:a="http://schemas.openxmlformats.org/drawingml/2006/main" xmlns:r="http://schemas.openxmlformats.org/officeDocument/2006/relationships" xmlns:p="http://schemas.openxmlformats.org/presentationml/2006/main">
   <p:cSld>
     <p:spTree>
@@ -40799,23 +41184,13 @@
               </a:rPr>
               <a:t>gitconfig</a:t>
             </a:r>
-            <a:endParaRPr lang="en-US" sz="3600" smtClean="0">
+            <a:endParaRPr lang="en-US" sz="3600" dirty="0" smtClean="0">
               <a:latin typeface="Consolas" panose="020B0609020204030204" pitchFamily="49" charset="0"/>
               <a:cs typeface="Consolas" panose="020B0609020204030204" pitchFamily="49" charset="0"/>
             </a:endParaRPr>
           </a:p>
           <a:p>
             <a:pPr algn="ctr"/>
-            <a:r>
-              <a:rPr lang="en-US" sz="3600" smtClean="0">
-                <a:solidFill>
-                  <a:srgbClr val="00B050"/>
-                </a:solidFill>
-                <a:latin typeface="Consolas" panose="020B0609020204030204" pitchFamily="49" charset="0"/>
-                <a:cs typeface="Consolas" panose="020B0609020204030204" pitchFamily="49" charset="0"/>
-              </a:rPr>
-              <a:t># </a:t>
-            </a:r>
             <a:r>
               <a:rPr lang="en-US" sz="3600" dirty="0" smtClean="0">
                 <a:solidFill>
@@ -40824,25 +41199,8 @@
                 <a:latin typeface="Consolas" panose="020B0609020204030204" pitchFamily="49" charset="0"/>
                 <a:cs typeface="Consolas" panose="020B0609020204030204" pitchFamily="49" charset="0"/>
               </a:rPr>
-              <a:t>The secret shortcuts of </a:t>
+              <a:t># The secret shortcuts of Tim, Dave and Kevin</a:t>
             </a:r>
-            <a:r>
-              <a:rPr lang="en-US" sz="3600" dirty="0" smtClean="0">
-                <a:solidFill>
-                  <a:srgbClr val="00B050"/>
-                </a:solidFill>
-                <a:latin typeface="Consolas" panose="020B0609020204030204" pitchFamily="49" charset="0"/>
-                <a:cs typeface="Consolas" panose="020B0609020204030204" pitchFamily="49" charset="0"/>
-              </a:rPr>
-              <a:t>Tim, Dave and Kevin</a:t>
-            </a:r>
-            <a:endParaRPr lang="en-US" sz="3600" dirty="0" smtClean="0">
-              <a:solidFill>
-                <a:srgbClr val="00B050"/>
-              </a:solidFill>
-              <a:latin typeface="Consolas" panose="020B0609020204030204" pitchFamily="49" charset="0"/>
-              <a:cs typeface="Consolas" panose="020B0609020204030204" pitchFamily="49" charset="0"/>
-            </a:endParaRPr>
           </a:p>
         </p:txBody>
       </p:sp>
@@ -40859,7 +41217,7 @@
 </p:sld>
 </file>
 
-<file path=ppt/slides/slide7.xml><?xml version="1.0" encoding="utf-8"?>
+<file path=ppt/slides/slide8.xml><?xml version="1.0" encoding="utf-8"?>
 <p:sld xmlns:a="http://schemas.openxmlformats.org/drawingml/2006/main" xmlns:r="http://schemas.openxmlformats.org/officeDocument/2006/relationships" xmlns:p="http://schemas.openxmlformats.org/presentationml/2006/main">
   <p:cSld>
     <p:spTree>
@@ -40934,7 +41292,7 @@
 </p:sld>
 </file>
 
-<file path=ppt/slides/slide8.xml><?xml version="1.0" encoding="utf-8"?>
+<file path=ppt/slides/slide9.xml><?xml version="1.0" encoding="utf-8"?>
 <p:sld xmlns:a="http://schemas.openxmlformats.org/drawingml/2006/main" xmlns:r="http://schemas.openxmlformats.org/officeDocument/2006/relationships" xmlns:p="http://schemas.openxmlformats.org/presentationml/2006/main">
   <p:cSld>
     <p:spTree>
@@ -41003,132 +41361,6 @@
     <p:extLst>
       <p:ext uri="{BB962C8B-B14F-4D97-AF65-F5344CB8AC3E}">
         <p14:creationId xmlns:p14="http://schemas.microsoft.com/office/powerpoint/2010/main" val="3181105465"/>
-      </p:ext>
-    </p:extLst>
-  </p:cSld>
-  <p:clrMapOvr>
-    <a:masterClrMapping/>
-  </p:clrMapOvr>
-</p:sld>
-</file>
-
-<file path=ppt/slides/slide9.xml><?xml version="1.0" encoding="utf-8"?>
-<p:sld xmlns:a="http://schemas.openxmlformats.org/drawingml/2006/main" xmlns:r="http://schemas.openxmlformats.org/officeDocument/2006/relationships" xmlns:p="http://schemas.openxmlformats.org/presentationml/2006/main">
-  <p:cSld>
-    <p:spTree>
-      <p:nvGrpSpPr>
-        <p:cNvPr id="1" name=""/>
-        <p:cNvGrpSpPr/>
-        <p:nvPr/>
-      </p:nvGrpSpPr>
-      <p:grpSpPr>
-        <a:xfrm>
-          <a:off x="0" y="0"/>
-          <a:ext cx="0" cy="0"/>
-          <a:chOff x="0" y="0"/>
-          <a:chExt cx="0" cy="0"/>
-        </a:xfrm>
-      </p:grpSpPr>
-      <p:sp>
-        <p:nvSpPr>
-          <p:cNvPr id="2" name="Title 1"/>
-          <p:cNvSpPr>
-            <a:spLocks noGrp="1"/>
-          </p:cNvSpPr>
-          <p:nvPr>
-            <p:ph type="title"/>
-          </p:nvPr>
-        </p:nvSpPr>
-        <p:spPr/>
-        <p:txBody>
-          <a:bodyPr/>
-          <a:lstStyle/>
-          <a:p>
-            <a:r>
-              <a:rPr lang="en-US" dirty="0" smtClean="0"/>
-              <a:t>Creating a local repository</a:t>
-            </a:r>
-            <a:endParaRPr lang="en-US" dirty="0"/>
-          </a:p>
-        </p:txBody>
-      </p:sp>
-      <p:sp>
-        <p:nvSpPr>
-          <p:cNvPr id="3" name="Content Placeholder 2"/>
-          <p:cNvSpPr>
-            <a:spLocks noGrp="1"/>
-          </p:cNvSpPr>
-          <p:nvPr>
-            <p:ph idx="1"/>
-          </p:nvPr>
-        </p:nvSpPr>
-        <p:spPr/>
-        <p:txBody>
-          <a:bodyPr anchor="ctr">
-            <a:normAutofit/>
-          </a:bodyPr>
-          <a:lstStyle/>
-          <a:p>
-            <a:pPr algn="ctr"/>
-            <a:r>
-              <a:rPr lang="en-US" sz="3600" dirty="0" err="1" smtClean="0">
-                <a:latin typeface="Consolas" panose="020B0609020204030204" pitchFamily="49" charset="0"/>
-                <a:cs typeface="Consolas" panose="020B0609020204030204" pitchFamily="49" charset="0"/>
-              </a:rPr>
-              <a:t>mkdir</a:t>
-            </a:r>
-            <a:r>
-              <a:rPr lang="en-US" sz="3600" dirty="0" smtClean="0">
-                <a:latin typeface="Consolas" panose="020B0609020204030204" pitchFamily="49" charset="0"/>
-                <a:cs typeface="Consolas" panose="020B0609020204030204" pitchFamily="49" charset="0"/>
-              </a:rPr>
-              <a:t> c:\source\deleteme</a:t>
-            </a:r>
-          </a:p>
-          <a:p>
-            <a:pPr algn="ctr"/>
-            <a:r>
-              <a:rPr lang="en-US" sz="3600" dirty="0">
-                <a:latin typeface="Consolas" panose="020B0609020204030204" pitchFamily="49" charset="0"/>
-                <a:cs typeface="Consolas" panose="020B0609020204030204" pitchFamily="49" charset="0"/>
-              </a:rPr>
-              <a:t>cd c:\source\deleteme</a:t>
-            </a:r>
-          </a:p>
-          <a:p>
-            <a:pPr algn="ctr"/>
-            <a:r>
-              <a:rPr lang="en-US" sz="3600" dirty="0" err="1">
-                <a:latin typeface="Consolas" panose="020B0609020204030204" pitchFamily="49" charset="0"/>
-                <a:cs typeface="Consolas" panose="020B0609020204030204" pitchFamily="49" charset="0"/>
-              </a:rPr>
-              <a:t>git</a:t>
-            </a:r>
-            <a:r>
-              <a:rPr lang="en-US" sz="3600" dirty="0">
-                <a:latin typeface="Consolas" panose="020B0609020204030204" pitchFamily="49" charset="0"/>
-                <a:cs typeface="Consolas" panose="020B0609020204030204" pitchFamily="49" charset="0"/>
-              </a:rPr>
-              <a:t> </a:t>
-            </a:r>
-            <a:r>
-              <a:rPr lang="en-US" sz="3600" dirty="0" err="1">
-                <a:latin typeface="Consolas" panose="020B0609020204030204" pitchFamily="49" charset="0"/>
-                <a:cs typeface="Consolas" panose="020B0609020204030204" pitchFamily="49" charset="0"/>
-              </a:rPr>
-              <a:t>init</a:t>
-            </a:r>
-            <a:endParaRPr lang="en-US" sz="3600" dirty="0">
-              <a:latin typeface="Consolas" panose="020B0609020204030204" pitchFamily="49" charset="0"/>
-              <a:cs typeface="Consolas" panose="020B0609020204030204" pitchFamily="49" charset="0"/>
-            </a:endParaRPr>
-          </a:p>
-        </p:txBody>
-      </p:sp>
-    </p:spTree>
-    <p:extLst>
-      <p:ext uri="{BB962C8B-B14F-4D97-AF65-F5344CB8AC3E}">
-        <p14:creationId xmlns:p14="http://schemas.microsoft.com/office/powerpoint/2010/main" val="1490018585"/>
       </p:ext>
     </p:extLst>
   </p:cSld>
@@ -41415,7 +41647,7 @@
   <a:extraClrSchemeLst/>
   <a:extLst>
     <a:ext uri="{05A4C25C-085E-4340-85A3-A5531E510DB2}">
-      <thm15:themeFamily xmlns="" xmlns:thm15="http://schemas.microsoft.com/office/thememl/2012/main" name="Retrospect" id="{5F128B03-DCCA-4EEB-AB3B-CF2899314A46}" vid="{3F1AAB62-24C6-49D2-8E01-B56FAC9A3DCD}"/>
+      <thm15:themeFamily xmlns:thm15="http://schemas.microsoft.com/office/thememl/2012/main" xmlns="" name="Retrospect" id="{5F128B03-DCCA-4EEB-AB3B-CF2899314A46}" vid="{3F1AAB62-24C6-49D2-8E01-B56FAC9A3DCD}"/>
     </a:ext>
   </a:extLst>
 </a:theme>
@@ -41676,7 +41908,7 @@
   <a:extraClrSchemeLst/>
   <a:extLst>
     <a:ext uri="{05A4C25C-085E-4340-85A3-A5531E510DB2}">
-      <thm15:themeFamily xmlns="" xmlns:thm15="http://schemas.microsoft.com/office/thememl/2012/main" name="Office Theme" id="{62F939B6-93AF-4DB8-9C6B-D6C7DFDC589F}" vid="{4A3C46E8-61CC-4603-A589-7422A47A8E4A}"/>
+      <thm15:themeFamily xmlns:thm15="http://schemas.microsoft.com/office/thememl/2012/main" xmlns="" name="Office Theme" id="{62F939B6-93AF-4DB8-9C6B-D6C7DFDC589F}" vid="{4A3C46E8-61CC-4603-A589-7422A47A8E4A}"/>
     </a:ext>
   </a:extLst>
 </a:theme>

--- a/GIT Workshop.pptx
+++ b/GIT Workshop.pptx
@@ -36264,18 +36264,40 @@
                 <a:latin typeface="Consolas" panose="020B0609020204030204" pitchFamily="49" charset="0"/>
                 <a:cs typeface="Consolas" panose="020B0609020204030204" pitchFamily="49" charset="0"/>
               </a:rPr>
-              <a:t> c:\source\deleteme</a:t>
+              <a:t> </a:t>
             </a:r>
+            <a:r>
+              <a:rPr lang="en-US" sz="3600" dirty="0" err="1" smtClean="0">
+                <a:latin typeface="Consolas" panose="020B0609020204030204" pitchFamily="49" charset="0"/>
+                <a:cs typeface="Consolas" panose="020B0609020204030204" pitchFamily="49" charset="0"/>
+              </a:rPr>
+              <a:t>deleteme</a:t>
+            </a:r>
+            <a:endParaRPr lang="en-US" sz="3600" dirty="0" smtClean="0">
+              <a:latin typeface="Consolas" panose="020B0609020204030204" pitchFamily="49" charset="0"/>
+              <a:cs typeface="Consolas" panose="020B0609020204030204" pitchFamily="49" charset="0"/>
+            </a:endParaRPr>
           </a:p>
           <a:p>
             <a:pPr algn="ctr"/>
             <a:r>
-              <a:rPr lang="en-US" sz="3600" dirty="0">
+              <a:rPr lang="en-US" sz="3600" dirty="0" smtClean="0">
                 <a:latin typeface="Consolas" panose="020B0609020204030204" pitchFamily="49" charset="0"/>
                 <a:cs typeface="Consolas" panose="020B0609020204030204" pitchFamily="49" charset="0"/>
               </a:rPr>
-              <a:t>cd c:\source\deleteme</a:t>
+              <a:t>cd </a:t>
             </a:r>
+            <a:r>
+              <a:rPr lang="en-US" sz="3600" dirty="0" err="1" smtClean="0">
+                <a:latin typeface="Consolas" panose="020B0609020204030204" pitchFamily="49" charset="0"/>
+                <a:cs typeface="Consolas" panose="020B0609020204030204" pitchFamily="49" charset="0"/>
+              </a:rPr>
+              <a:t>deleteme</a:t>
+            </a:r>
+            <a:endParaRPr lang="en-US" sz="3600" dirty="0">
+              <a:latin typeface="Consolas" panose="020B0609020204030204" pitchFamily="49" charset="0"/>
+              <a:cs typeface="Consolas" panose="020B0609020204030204" pitchFamily="49" charset="0"/>
+            </a:endParaRPr>
           </a:p>
           <a:p>
             <a:pPr algn="ctr"/>
